--- a/materi-technopreneurship/ppt/PPT02_SubCPMK_1_2_Platform_Fintech_AI_IoT.pptx
+++ b/materi-technopreneurship/ppt/PPT02_SubCPMK_1_2_Platform_Fintech_AI_IoT.pptx
@@ -3242,7 +3242,7 @@
         </p:nvSpPr>
         <p:spPr>
           <a:xfrm>
-            <a:off x="731520" y="1371600"/>
+            <a:off x="731520" y="1280160"/>
             <a:ext cx="10515600" cy="365760"/>
           </a:xfrm>
           <a:prstGeom prst="rect">
@@ -3258,13 +3258,13 @@
           <a:p>
             <a:pPr algn="l"/>
             <a:r>
-              <a:rPr sz="1600" b="1">
+              <a:rPr sz="1500" b="1">
                 <a:solidFill>
                   <a:srgbClr val="D97B2A"/>
                 </a:solidFill>
                 <a:latin typeface="Calibri"/>
               </a:rPr>
-              <a:t>MATA KULIAH TECHNOPRENEURSHIP</a:t>
+              <a:t>TECHNOPRENEURSHIP — TEKNOLOGI UNTUK MANUSIA</a:t>
             </a:r>
           </a:p>
         </p:txBody>
@@ -3277,8 +3277,8 @@
         </p:nvSpPr>
         <p:spPr>
           <a:xfrm>
-            <a:off x="731520" y="1920240"/>
-            <a:ext cx="10515600" cy="1371600"/>
+            <a:off x="731520" y="1828800"/>
+            <a:ext cx="10515600" cy="1463040"/>
           </a:xfrm>
           <a:prstGeom prst="rect">
             <a:avLst/>
@@ -3293,14 +3293,14 @@
           <a:p>
             <a:pPr algn="l"/>
             <a:r>
-              <a:rPr sz="3400" b="1">
+              <a:rPr sz="3000" b="1">
                 <a:solidFill>
                   <a:srgbClr val="FFFFFF"/>
                 </a:solidFill>
                 <a:latin typeface="Calibri"/>
               </a:rPr>
-              <a:t>Peran Teknologi dalam Bisnis:
-Platform, Fintech, AI, dan IoT</a:t>
+              <a:t>Teknologi dalam Bisnis:
+Platform, Pembayaran Digital, AI, dan IoT</a:t>
             </a:r>
           </a:p>
         </p:txBody>
@@ -3313,8 +3313,8 @@
         </p:nvSpPr>
         <p:spPr>
           <a:xfrm>
-            <a:off x="731520" y="4114800"/>
-            <a:ext cx="10515600" cy="365760"/>
+            <a:off x="731520" y="4023360"/>
+            <a:ext cx="10515600" cy="457200"/>
           </a:xfrm>
           <a:prstGeom prst="rect">
             <a:avLst/>
@@ -3329,13 +3329,13 @@
           <a:p>
             <a:pPr algn="l"/>
             <a:r>
-              <a:rPr sz="1800" b="0">
+              <a:rPr sz="1700" b="0">
                 <a:solidFill>
                   <a:srgbClr val="E6EEF2"/>
                 </a:solidFill>
                 <a:latin typeface="Calibri"/>
               </a:rPr>
-              <a:t>Presentasi 2 · Sub-CPMK 1.2 · Level Dasar</a:t>
+              <a:t>Dipahami dengan bahasa sehari-hari · Siap dipilih untuk ide Anda</a:t>
             </a:r>
           </a:p>
         </p:txBody>
@@ -3349,7 +3349,7 @@
         <p:spPr>
           <a:xfrm>
             <a:off x="731520" y="5669280"/>
-            <a:ext cx="10515600" cy="731520"/>
+            <a:ext cx="10515600" cy="640080"/>
           </a:xfrm>
           <a:prstGeom prst="rect">
             <a:avLst/>
@@ -3370,8 +3370,7 @@
                 </a:solidFill>
                 <a:latin typeface="Calibri"/>
               </a:rPr>
-              <a:t>S1 Bisnis Digital — Semester 3
-Referensi poros: Sulistyandari (Penerbit Adab)</a:t>
+              <a:t>S1 Bisnis Digital Semester 3 · Sub-CPMK 1.2</a:t>
             </a:r>
           </a:p>
         </p:txBody>
@@ -3504,13 +3503,13 @@
           <a:p>
             <a:pPr algn="l"/>
             <a:r>
-              <a:rPr sz="2800" b="1">
+              <a:rPr sz="2600" b="1">
                 <a:solidFill>
                   <a:srgbClr val="0F2C4C"/>
                 </a:solidFill>
                 <a:latin typeface="Calibri"/>
               </a:rPr>
-              <a:t>3. AI (Artificial Intelligence) — versi pemula</a:t>
+              <a:t>3. AI untuk pemula</a:t>
             </a:r>
           </a:p>
         </p:txBody>
@@ -3545,7 +3544,7 @@
                 </a:solidFill>
                 <a:latin typeface="Calibri"/>
               </a:rPr>
-              <a:t>Komputer membantu mengenali pola &amp; mengotomatisasi</a:t>
+              <a:t>Bayangkan asisten yang membantu kerja berulang</a:t>
             </a:r>
           </a:p>
         </p:txBody>
@@ -3617,13 +3616,13 @@
           <a:p>
             <a:pPr algn="l"/>
             <a:r>
-              <a:rPr sz="1800" b="0">
+              <a:rPr sz="1700" b="0">
                 <a:solidFill>
                   <a:srgbClr val="1C1C1C"/>
                 </a:solidFill>
                 <a:latin typeface="Calibri"/>
               </a:rPr>
-              <a:t>AI membantu sistem mengenali pola, memberi rekomendasi, atau mengotomatisasi tugas berulang—supaya keputusan/layanan lebih cepat.</a:t>
+              <a:t>AI (kecerdasan buatan) membantu komputer mengenali pola, memberi saran, atau mengerjakan tugas yang berulang.</a:t>
             </a:r>
           </a:p>
         </p:txBody>
@@ -3680,7 +3679,7 @@
         <p:spPr>
           <a:xfrm>
             <a:off x="548640" y="2926080"/>
-            <a:ext cx="3611880" cy="731520"/>
+            <a:ext cx="3611880" cy="777240"/>
           </a:xfrm>
           <a:prstGeom prst="rect">
             <a:avLst/>
@@ -3723,7 +3722,7 @@
         <p:spPr>
           <a:xfrm>
             <a:off x="731520" y="3063240"/>
-            <a:ext cx="3200400" cy="457200"/>
+            <a:ext cx="3200400" cy="502920"/>
           </a:xfrm>
           <a:prstGeom prst="rect">
             <a:avLst/>
@@ -3744,7 +3743,7 @@
                 </a:solidFill>
                 <a:latin typeface="Calibri"/>
               </a:rPr>
-              <a:t>Chatbot layanan</a:t>
+              <a:t>Chat otomatis</a:t>
             </a:r>
           </a:p>
         </p:txBody>
@@ -3779,7 +3778,7 @@
                 </a:solidFill>
                 <a:latin typeface="Calibri"/>
               </a:rPr>
-              <a:t>Menjawab pertanyaan pelanggan 24 jam untuk pertanyaan rutin</a:t>
+              <a:t>Menjawab pertanyaan yang sama berulang kali, misalnya jam buka &amp; harga.</a:t>
             </a:r>
           </a:p>
         </p:txBody>
@@ -3836,7 +3835,7 @@
         <p:spPr>
           <a:xfrm>
             <a:off x="4343400" y="2926080"/>
-            <a:ext cx="3611880" cy="731520"/>
+            <a:ext cx="3611880" cy="777240"/>
           </a:xfrm>
           <a:prstGeom prst="rect">
             <a:avLst/>
@@ -3879,7 +3878,7 @@
         <p:spPr>
           <a:xfrm>
             <a:off x="4526280" y="3063240"/>
-            <a:ext cx="3200400" cy="457200"/>
+            <a:ext cx="3200400" cy="502920"/>
           </a:xfrm>
           <a:prstGeom prst="rect">
             <a:avLst/>
@@ -3900,7 +3899,7 @@
                 </a:solidFill>
                 <a:latin typeface="Calibri"/>
               </a:rPr>
-              <a:t>Rekomendasi produk</a:t>
+              <a:t>Saran produk</a:t>
             </a:r>
           </a:p>
         </p:txBody>
@@ -3935,7 +3934,7 @@
                 </a:solidFill>
                 <a:latin typeface="Calibri"/>
               </a:rPr>
-              <a:t>Menyarankan barang yang relevan berdasarkan perilaku pengguna</a:t>
+              <a:t>“Orang yang beli A sering juga lihat B.”</a:t>
             </a:r>
           </a:p>
         </p:txBody>
@@ -3992,7 +3991,7 @@
         <p:spPr>
           <a:xfrm>
             <a:off x="8138160" y="2926080"/>
-            <a:ext cx="3611880" cy="731520"/>
+            <a:ext cx="3611880" cy="777240"/>
           </a:xfrm>
           <a:prstGeom prst="rect">
             <a:avLst/>
@@ -4035,7 +4034,7 @@
         <p:spPr>
           <a:xfrm>
             <a:off x="8321040" y="3063240"/>
-            <a:ext cx="3200400" cy="457200"/>
+            <a:ext cx="3200400" cy="502920"/>
           </a:xfrm>
           <a:prstGeom prst="rect">
             <a:avLst/>
@@ -4056,7 +4055,7 @@
                 </a:solidFill>
                 <a:latin typeface="Calibri"/>
               </a:rPr>
-              <a:t>Deteksi fraud sederhana</a:t>
+              <a:t>Tanda bahaya transaksi</a:t>
             </a:r>
           </a:p>
         </p:txBody>
@@ -4091,7 +4090,7 @@
                 </a:solidFill>
                 <a:latin typeface="Calibri"/>
               </a:rPr>
-              <a:t>Menandai transaksi mencurigakan untuk dicek lebih lanjut</a:t>
+              <a:t>Membantu menandai hal yang terasa janggal untuk dicek manusia.</a:t>
             </a:r>
           </a:p>
         </p:txBody>
@@ -4126,7 +4125,7 @@
                 </a:solidFill>
                 <a:latin typeface="Calibri"/>
               </a:rPr>
-              <a:t>Technopreneurship · S1 Bisnis Digital Sem 3 · Sub-CPMK 1.2</a:t>
+              <a:t>Technopreneurship · Bisnis Digital Sem 3 · Sub-CPMK 1.2</a:t>
             </a:r>
           </a:p>
         </p:txBody>
@@ -4294,13 +4293,13 @@
           <a:p>
             <a:pPr algn="l"/>
             <a:r>
-              <a:rPr sz="2800" b="1">
+              <a:rPr sz="2600" b="1">
                 <a:solidFill>
                   <a:srgbClr val="0F2C4C"/>
                 </a:solidFill>
                 <a:latin typeface="Calibri"/>
               </a:rPr>
-              <a:t>Peringatan penting tentang AI</a:t>
+              <a:t>Jeda penting sebelum bilang “pakai AI”</a:t>
             </a:r>
           </a:p>
         </p:txBody>
@@ -4335,7 +4334,7 @@
                 </a:solidFill>
                 <a:latin typeface="Calibri"/>
               </a:rPr>
-              <a:t>Jangan karena tren</a:t>
+              <a:t>Tiga pertanyaan manusiawi</a:t>
             </a:r>
           </a:p>
         </p:txBody>
@@ -4391,8 +4390,8 @@
         </p:nvSpPr>
         <p:spPr>
           <a:xfrm>
-            <a:off x="1371600" y="2011680"/>
-            <a:ext cx="9418320" cy="548640"/>
+            <a:off x="1463040" y="1965960"/>
+            <a:ext cx="9235440" cy="457200"/>
           </a:xfrm>
           <a:prstGeom prst="rect">
             <a:avLst/>
@@ -4407,13 +4406,13 @@
           <a:p>
             <a:pPr algn="ctr"/>
             <a:r>
-              <a:rPr sz="2000" b="1">
+              <a:rPr sz="1800" b="1">
                 <a:solidFill>
                   <a:srgbClr val="D97B2A"/>
                 </a:solidFill>
                 <a:latin typeface="Calibri"/>
               </a:rPr>
-              <a:t>Sebelum bilang “kita pakai AI”, tanya dulu:</a:t>
+              <a:t>Tanyakan pada diri sendiri:</a:t>
             </a:r>
           </a:p>
         </p:txBody>
@@ -4426,8 +4425,8 @@
         </p:nvSpPr>
         <p:spPr>
           <a:xfrm>
-            <a:off x="2011680" y="2926080"/>
-            <a:ext cx="8138160" cy="2194560"/>
+            <a:off x="2011680" y="2651760"/>
+            <a:ext cx="8138160" cy="2560320"/>
           </a:xfrm>
           <a:prstGeom prst="rect">
             <a:avLst/>
@@ -4452,7 +4451,7 @@
                 </a:solidFill>
                 <a:latin typeface="Calibri"/>
               </a:rPr>
-              <a:t>1. Masalah apa yang diselesaikan?</a:t>
+              <a:t>1. Orang mana yang sedang kita tolong?</a:t>
             </a:r>
           </a:p>
           <a:p>
@@ -4468,7 +4467,7 @@
                 </a:solidFill>
                 <a:latin typeface="Calibri"/>
               </a:rPr>
-              <a:t>2. Apakah ada cara lebih sederhana?</a:t>
+              <a:t>2. Apakah ada cara yang lebih sederhana dulu?</a:t>
             </a:r>
           </a:p>
           <a:p>
@@ -4484,7 +4483,7 @@
                 </a:solidFill>
                 <a:latin typeface="Calibri"/>
               </a:rPr>
-              <a:t>3. Apakah data &amp; proses kita sudah cukup rapi?</a:t>
+              <a:t>3. Apakah catatan/proses kita sudah rapi?</a:t>
             </a:r>
           </a:p>
           <a:p>
@@ -4516,7 +4515,7 @@
                 </a:solidFill>
                 <a:latin typeface="Calibri"/>
               </a:rPr>
-              <a:t>Seringkali WhatsApp + spreadsheet + formulir sudah cukup untuk MVP awal.</a:t>
+              <a:t>Seringkali chat WhatsApp + formulir + spreadsheet sudah cukup di awal.</a:t>
             </a:r>
           </a:p>
         </p:txBody>
@@ -4551,7 +4550,7 @@
                 </a:solidFill>
                 <a:latin typeface="Calibri"/>
               </a:rPr>
-              <a:t>Technopreneurship · S1 Bisnis Digital Sem 3 · Sub-CPMK 1.2</a:t>
+              <a:t>Technopreneurship · Bisnis Digital Sem 3 · Sub-CPMK 1.2</a:t>
             </a:r>
           </a:p>
         </p:txBody>
@@ -4719,13 +4718,13 @@
           <a:p>
             <a:pPr algn="l"/>
             <a:r>
-              <a:rPr sz="2800" b="1">
+              <a:rPr sz="2600" b="1">
                 <a:solidFill>
                   <a:srgbClr val="0F2C4C"/>
                 </a:solidFill>
                 <a:latin typeface="Calibri"/>
               </a:rPr>
-              <a:t>4. IoT (Internet of Things) — versi pemula</a:t>
+              <a:t>4. IoT untuk pemula</a:t>
             </a:r>
           </a:p>
         </p:txBody>
@@ -4760,7 +4759,7 @@
                 </a:solidFill>
                 <a:latin typeface="Calibri"/>
               </a:rPr>
-              <a:t>Perangkat fisik terhubung internet dan mengirim data</a:t>
+              <a:t>Benda sehari-hari yang bisa “memberi kabar”</a:t>
             </a:r>
           </a:p>
         </p:txBody>
@@ -4838,7 +4837,7 @@
                 </a:solidFill>
                 <a:latin typeface="Calibri"/>
               </a:rPr>
-              <a:t>IoT menghubungkan benda nyata (sensor, alat, mesin) ke internet supaya datanya bisa dipantau dan dipakai untuk keputusan bisnis.</a:t>
+              <a:t>IoT artinya perangkat fisik (sensor, alat, mesin) terhubung internet dan mengirim informasi agar kita bisa memantau dari jauh.</a:t>
             </a:r>
           </a:p>
         </p:txBody>
@@ -4895,7 +4894,7 @@
         <p:spPr>
           <a:xfrm>
             <a:off x="548640" y="2926080"/>
-            <a:ext cx="3611880" cy="731520"/>
+            <a:ext cx="3611880" cy="777240"/>
           </a:xfrm>
           <a:prstGeom prst="rect">
             <a:avLst/>
@@ -4938,7 +4937,7 @@
         <p:spPr>
           <a:xfrm>
             <a:off x="731520" y="3063240"/>
-            <a:ext cx="3200400" cy="457200"/>
+            <a:ext cx="3200400" cy="502920"/>
           </a:xfrm>
           <a:prstGeom prst="rect">
             <a:avLst/>
@@ -4959,7 +4958,7 @@
                 </a:solidFill>
                 <a:latin typeface="Calibri"/>
               </a:rPr>
-              <a:t>Sensor stok/suhu</a:t>
+              <a:t>Sensor suhu/stok</a:t>
             </a:r>
           </a:p>
         </p:txBody>
@@ -4994,7 +4993,7 @@
                 </a:solidFill>
                 <a:latin typeface="Calibri"/>
               </a:rPr>
-              <a:t>Pantau kondisi gudang atau produk sensitif secara berkala</a:t>
+              <a:t>Tahu kondisi gudang tanpa harus bolak-balik memeriksa.</a:t>
             </a:r>
           </a:p>
         </p:txBody>
@@ -5051,7 +5050,7 @@
         <p:spPr>
           <a:xfrm>
             <a:off x="4343400" y="2926080"/>
-            <a:ext cx="3611880" cy="731520"/>
+            <a:ext cx="3611880" cy="777240"/>
           </a:xfrm>
           <a:prstGeom prst="rect">
             <a:avLst/>
@@ -5094,7 +5093,7 @@
         <p:spPr>
           <a:xfrm>
             <a:off x="4526280" y="3063240"/>
-            <a:ext cx="3200400" cy="457200"/>
+            <a:ext cx="3200400" cy="502920"/>
           </a:xfrm>
           <a:prstGeom prst="rect">
             <a:avLst/>
@@ -5115,7 +5114,7 @@
                 </a:solidFill>
                 <a:latin typeface="Calibri"/>
               </a:rPr>
-              <a:t>Pelacak pengiriman</a:t>
+              <a:t>Pelacak kiriman</a:t>
             </a:r>
           </a:p>
         </p:txBody>
@@ -5150,7 +5149,7 @@
                 </a:solidFill>
                 <a:latin typeface="Calibri"/>
               </a:rPr>
-              <a:t>Ketahui posisi barang untuk layanan pelanggan lebih baik</a:t>
+              <a:t>Pelanggan lebih tenang karena status barang jelas.</a:t>
             </a:r>
           </a:p>
         </p:txBody>
@@ -5207,7 +5206,7 @@
         <p:spPr>
           <a:xfrm>
             <a:off x="8138160" y="2926080"/>
-            <a:ext cx="3611880" cy="731520"/>
+            <a:ext cx="3611880" cy="777240"/>
           </a:xfrm>
           <a:prstGeom prst="rect">
             <a:avLst/>
@@ -5250,7 +5249,7 @@
         <p:spPr>
           <a:xfrm>
             <a:off x="8321040" y="3063240"/>
-            <a:ext cx="3200400" cy="457200"/>
+            <a:ext cx="3200400" cy="502920"/>
           </a:xfrm>
           <a:prstGeom prst="rect">
             <a:avLst/>
@@ -5271,7 +5270,7 @@
                 </a:solidFill>
                 <a:latin typeface="Calibri"/>
               </a:rPr>
-              <a:t>Monitoring sederhana</a:t>
+              <a:t>Monitoring alat</a:t>
             </a:r>
           </a:p>
         </p:txBody>
@@ -5306,7 +5305,7 @@
                 </a:solidFill>
                 <a:latin typeface="Calibri"/>
               </a:rPr>
-              <a:t>Alat/mesin mengirim status “normal/bermasalah”</a:t>
+              <a:t>Tahu apakah alat berjalan normal atau perlu dicek.</a:t>
             </a:r>
           </a:p>
         </p:txBody>
@@ -5341,7 +5340,7 @@
                 </a:solidFill>
                 <a:latin typeface="Calibri"/>
               </a:rPr>
-              <a:t>Technopreneurship · S1 Bisnis Digital Sem 3 · Sub-CPMK 1.2</a:t>
+              <a:t>Technopreneurship · Bisnis Digital Sem 3 · Sub-CPMK 1.2</a:t>
             </a:r>
           </a:p>
         </p:txBody>
@@ -5509,13 +5508,13 @@
           <a:p>
             <a:pPr algn="l"/>
             <a:r>
-              <a:rPr sz="2800" b="1">
+              <a:rPr sz="2600" b="1">
                 <a:solidFill>
                   <a:srgbClr val="0F2C4C"/>
                 </a:solidFill>
                 <a:latin typeface="Calibri"/>
               </a:rPr>
-              <a:t>Empat teknologi dalam satu pandangan</a:t>
+              <a:t>Satu layar untuk mengingat</a:t>
             </a:r>
           </a:p>
         </p:txBody>
@@ -5550,7 +5549,7 @@
                 </a:solidFill>
                 <a:latin typeface="Calibri"/>
               </a:rPr>
-              <a:t>Pilih sesuai masalah, bukan karena kata keren</a:t>
+              <a:t>Pilih sesuai masalah orang</a:t>
             </a:r>
           </a:p>
         </p:txBody>
@@ -5663,7 +5662,7 @@
                 </a:solidFill>
                 <a:latin typeface="Calibri"/>
               </a:rPr>
-              <a:t>Peran dalam bisnis</a:t>
+              <a:t>Menolong seperti apa?</a:t>
             </a:r>
           </a:p>
         </p:txBody>
@@ -5698,7 +5697,7 @@
                 </a:solidFill>
                 <a:latin typeface="Calibri"/>
               </a:rPr>
-              <a:t>Contoh</a:t>
+              <a:t>Contoh akrab</a:t>
             </a:r>
           </a:p>
         </p:txBody>
@@ -5770,7 +5769,7 @@
           <a:p>
             <a:pPr algn="l"/>
             <a:r>
-              <a:rPr sz="1600" b="1">
+              <a:rPr sz="1500" b="1">
                 <a:solidFill>
                   <a:srgbClr val="0F2C4C"/>
                 </a:solidFill>
@@ -5805,7 +5804,7 @@
           <a:p>
             <a:pPr algn="l"/>
             <a:r>
-              <a:rPr sz="1500" b="0">
+              <a:rPr sz="1400" b="0">
                 <a:solidFill>
                   <a:srgbClr val="1C1C1C"/>
                 </a:solidFill>
@@ -5840,13 +5839,13 @@
           <a:p>
             <a:pPr algn="l"/>
             <a:r>
-              <a:rPr sz="1500" b="0">
+              <a:rPr sz="1400" b="0">
                 <a:solidFill>
                   <a:srgbClr val="5A6570"/>
                 </a:solidFill>
                 <a:latin typeface="Calibri"/>
               </a:rPr>
-              <a:t>Marketplace, ride-hailing</a:t>
+              <a:t>Gojek, marketplace</a:t>
             </a:r>
           </a:p>
         </p:txBody>
@@ -5918,13 +5917,13 @@
           <a:p>
             <a:pPr algn="l"/>
             <a:r>
-              <a:rPr sz="1600" b="1">
+              <a:rPr sz="1500" b="1">
                 <a:solidFill>
                   <a:srgbClr val="0F2C4C"/>
                 </a:solidFill>
                 <a:latin typeface="Calibri"/>
               </a:rPr>
-              <a:t>Fintech</a:t>
+              <a:t>Pembayaran digital</a:t>
             </a:r>
           </a:p>
         </p:txBody>
@@ -5953,13 +5952,13 @@
           <a:p>
             <a:pPr algn="l"/>
             <a:r>
-              <a:rPr sz="1500" b="0">
+              <a:rPr sz="1400" b="0">
                 <a:solidFill>
                   <a:srgbClr val="1C1C1C"/>
                 </a:solidFill>
                 <a:latin typeface="Calibri"/>
               </a:rPr>
-              <a:t>Memudahkan uang &amp; catatan</a:t>
+              <a:t>Mempermudah bayar &amp; catat</a:t>
             </a:r>
           </a:p>
         </p:txBody>
@@ -5988,13 +5987,13 @@
           <a:p>
             <a:pPr algn="l"/>
             <a:r>
-              <a:rPr sz="1500" b="0">
+              <a:rPr sz="1400" b="0">
                 <a:solidFill>
                   <a:srgbClr val="5A6570"/>
                 </a:solidFill>
                 <a:latin typeface="Calibri"/>
               </a:rPr>
-              <a:t>QRIS, e-wallet, gateway</a:t>
+              <a:t>QRIS, e-wallet</a:t>
             </a:r>
           </a:p>
         </p:txBody>
@@ -6066,7 +6065,7 @@
           <a:p>
             <a:pPr algn="l"/>
             <a:r>
-              <a:rPr sz="1600" b="1">
+              <a:rPr sz="1500" b="1">
                 <a:solidFill>
                   <a:srgbClr val="0F2C4C"/>
                 </a:solidFill>
@@ -6101,13 +6100,13 @@
           <a:p>
             <a:pPr algn="l"/>
             <a:r>
-              <a:rPr sz="1500" b="0">
+              <a:rPr sz="1400" b="0">
                 <a:solidFill>
                   <a:srgbClr val="1C1C1C"/>
                 </a:solidFill>
                 <a:latin typeface="Calibri"/>
               </a:rPr>
-              <a:t>Pola, rekomendasi, otomasi</a:t>
+              <a:t>Membantu kerja berulang &amp; saran</a:t>
             </a:r>
           </a:p>
         </p:txBody>
@@ -6136,13 +6135,13 @@
           <a:p>
             <a:pPr algn="l"/>
             <a:r>
-              <a:rPr sz="1500" b="0">
+              <a:rPr sz="1400" b="0">
                 <a:solidFill>
                   <a:srgbClr val="5A6570"/>
                 </a:solidFill>
                 <a:latin typeface="Calibri"/>
               </a:rPr>
-              <a:t>Chatbot, rekomendasi produk</a:t>
+              <a:t>Chat otomatis, rekomendasi</a:t>
             </a:r>
           </a:p>
         </p:txBody>
@@ -6214,7 +6213,7 @@
           <a:p>
             <a:pPr algn="l"/>
             <a:r>
-              <a:rPr sz="1600" b="1">
+              <a:rPr sz="1500" b="1">
                 <a:solidFill>
                   <a:srgbClr val="0F2C4C"/>
                 </a:solidFill>
@@ -6249,13 +6248,13 @@
           <a:p>
             <a:pPr algn="l"/>
             <a:r>
-              <a:rPr sz="1500" b="0">
+              <a:rPr sz="1400" b="0">
                 <a:solidFill>
                   <a:srgbClr val="1C1C1C"/>
                 </a:solidFill>
                 <a:latin typeface="Calibri"/>
               </a:rPr>
-              <a:t>Data dari dunia fisik</a:t>
+              <a:t>Mengambil kabar dari benda nyata</a:t>
             </a:r>
           </a:p>
         </p:txBody>
@@ -6284,13 +6283,13 @@
           <a:p>
             <a:pPr algn="l"/>
             <a:r>
-              <a:rPr sz="1500" b="0">
+              <a:rPr sz="1400" b="0">
                 <a:solidFill>
                   <a:srgbClr val="5A6570"/>
                 </a:solidFill>
                 <a:latin typeface="Calibri"/>
               </a:rPr>
-              <a:t>Sensor, pelacak, monitoring</a:t>
+              <a:t>Sensor, pelacak</a:t>
             </a:r>
           </a:p>
         </p:txBody>
@@ -6325,7 +6324,7 @@
                 </a:solidFill>
                 <a:latin typeface="Calibri"/>
               </a:rPr>
-              <a:t>Technopreneurship · S1 Bisnis Digital Sem 3 · Sub-CPMK 1.2</a:t>
+              <a:t>Technopreneurship · Bisnis Digital Sem 3 · Sub-CPMK 1.2</a:t>
             </a:r>
           </a:p>
         </p:txBody>
@@ -6493,13 +6492,13 @@
           <a:p>
             <a:pPr algn="l"/>
             <a:r>
-              <a:rPr sz="2800" b="1">
+              <a:rPr sz="2600" b="1">
                 <a:solidFill>
                   <a:srgbClr val="0F2C4C"/>
                 </a:solidFill>
                 <a:latin typeface="Calibri"/>
               </a:rPr>
-              <a:t>Cara memilih teknologi (untuk pemula)</a:t>
+              <a:t>Cara memilih yang aman untuk pemula</a:t>
             </a:r>
           </a:p>
         </p:txBody>
@@ -6534,7 +6533,7 @@
                 </a:solidFill>
                 <a:latin typeface="Calibri"/>
               </a:rPr>
-              <a:t>Urutan berpikir yang aman</a:t>
+              <a:t>Empat langkah yang bisa Anda praktikkan minggu ini</a:t>
             </a:r>
           </a:p>
         </p:txBody>
@@ -6690,7 +6689,7 @@
                 </a:solidFill>
                 <a:latin typeface="Calibri"/>
               </a:rPr>
-              <a:t>Masalah &amp; pengguna</a:t>
+              <a:t>Pahami orangnya</a:t>
             </a:r>
           </a:p>
         </p:txBody>
@@ -6725,7 +6724,7 @@
                 </a:solidFill>
                 <a:latin typeface="Calibri"/>
               </a:rPr>
-              <a:t>Siapa sakitnya? Seberapa sering?</a:t>
+              <a:t>Siapa yang kesulitan? Seberapa sering?</a:t>
             </a:r>
           </a:p>
         </p:txBody>
@@ -6881,7 +6880,7 @@
                 </a:solidFill>
                 <a:latin typeface="Calibri"/>
               </a:rPr>
-              <a:t>Solusi paling sederhana</a:t>
+              <a:t>Coba cara sederhana</a:t>
             </a:r>
           </a:p>
         </p:txBody>
@@ -6916,7 +6915,7 @@
                 </a:solidFill>
                 <a:latin typeface="Calibri"/>
               </a:rPr>
-              <a:t>Manual / form / WA dulu jika cukup</a:t>
+              <a:t>Manual, chat, formulir—jika cukup, itu sah.</a:t>
             </a:r>
           </a:p>
         </p:txBody>
@@ -7072,7 +7071,7 @@
                 </a:solidFill>
                 <a:latin typeface="Calibri"/>
               </a:rPr>
-              <a:t>Solusi digital dasar</a:t>
+              <a:t>Tambah digital dasar</a:t>
             </a:r>
           </a:p>
         </p:txBody>
@@ -7107,7 +7106,7 @@
                 </a:solidFill>
                 <a:latin typeface="Calibri"/>
               </a:rPr>
-              <a:t>Web sederhana, katalog, pembayaran</a:t>
+              <a:t>Katalog online, pembayaran mudah, catatan rapi.</a:t>
             </a:r>
           </a:p>
         </p:txBody>
@@ -7263,7 +7262,7 @@
                 </a:solidFill>
                 <a:latin typeface="Calibri"/>
               </a:rPr>
-              <a:t>Teknologi lanjutan</a:t>
+              <a:t>Baru teknologi lanjut</a:t>
             </a:r>
           </a:p>
         </p:txBody>
@@ -7298,7 +7297,7 @@
                 </a:solidFill>
                 <a:latin typeface="Calibri"/>
               </a:rPr>
-              <a:t>AI/IoT/platform hanya jika benar-benar perlu</a:t>
+              <a:t>AI/IoT/platform hanya jika benar-benar dibutuhkan.</a:t>
             </a:r>
           </a:p>
         </p:txBody>
@@ -7333,7 +7332,7 @@
                 </a:solidFill>
                 <a:latin typeface="Calibri"/>
               </a:rPr>
-              <a:t>Technopreneurship · S1 Bisnis Digital Sem 3 · Sub-CPMK 1.2</a:t>
+              <a:t>Technopreneurship · Bisnis Digital Sem 3 · Sub-CPMK 1.2</a:t>
             </a:r>
           </a:p>
         </p:txBody>
@@ -7501,13 +7500,13 @@
           <a:p>
             <a:pPr algn="l"/>
             <a:r>
-              <a:rPr sz="2800" b="1">
+              <a:rPr sz="2600" b="1">
                 <a:solidFill>
                   <a:srgbClr val="0F2C4C"/>
                 </a:solidFill>
                 <a:latin typeface="Calibri"/>
               </a:rPr>
-              <a:t>Cek pemahaman cepat</a:t>
+              <a:t>Latihan cepat: pasangkan</a:t>
             </a:r>
           </a:p>
         </p:txBody>
@@ -7542,7 +7541,7 @@
                 </a:solidFill>
                 <a:latin typeface="Calibri"/>
               </a:rPr>
-              <a:t>Pasangkan masalah dengan teknologi</a:t>
+              <a:t>Masalah orang → bantuan teknologi</a:t>
             </a:r>
           </a:p>
         </p:txBody>
@@ -7698,7 +7697,7 @@
                 </a:solidFill>
                 <a:latin typeface="Calibri"/>
               </a:rPr>
-              <a:t>Ingin mempertemukan penjual UMKM dan pembeli kampus</a:t>
+              <a:t>Ingin mempertemukan UMKM kampus dengan pembeli mahasiswa</a:t>
             </a:r>
           </a:p>
         </p:txBody>
@@ -7733,7 +7732,7 @@
                 </a:solidFill>
                 <a:latin typeface="Calibri"/>
               </a:rPr>
-              <a:t>Jawaban: Platform</a:t>
+              <a:t>Arah jawaban: Platform</a:t>
             </a:r>
           </a:p>
         </p:txBody>
@@ -7924,7 +7923,7 @@
                 </a:solidFill>
                 <a:latin typeface="Calibri"/>
               </a:rPr>
-              <a:t>Jawaban: Fintech (QRIS/gateway)</a:t>
+              <a:t>Arah jawaban: Pembayaran digital (QRIS)</a:t>
             </a:r>
           </a:p>
         </p:txBody>
@@ -8080,7 +8079,7 @@
                 </a:solidFill>
                 <a:latin typeface="Calibri"/>
               </a:rPr>
-              <a:t>Ingin menjawab FAQ pelanggan otomatis malam hari</a:t>
+              <a:t>Ingin menjawab pertanyaan yang sama tiap malam</a:t>
             </a:r>
           </a:p>
         </p:txBody>
@@ -8115,7 +8114,7 @@
                 </a:solidFill>
                 <a:latin typeface="Calibri"/>
               </a:rPr>
-              <a:t>Jawaban: AI (chatbot)</a:t>
+              <a:t>Arah jawaban: AI / chat otomatis</a:t>
             </a:r>
           </a:p>
         </p:txBody>
@@ -8271,7 +8270,7 @@
                 </a:solidFill>
                 <a:latin typeface="Calibri"/>
               </a:rPr>
-              <a:t>Ingin pantau suhu kulkas toko dari jarak jauh</a:t>
+              <a:t>Ingin pantau suhu kulkas toko dari kos</a:t>
             </a:r>
           </a:p>
         </p:txBody>
@@ -8306,7 +8305,7 @@
                 </a:solidFill>
                 <a:latin typeface="Calibri"/>
               </a:rPr>
-              <a:t>Jawaban: IoT (sensor)</a:t>
+              <a:t>Arah jawaban: IoT / sensor</a:t>
             </a:r>
           </a:p>
         </p:txBody>
@@ -8341,7 +8340,7 @@
                 </a:solidFill>
                 <a:latin typeface="Calibri"/>
               </a:rPr>
-              <a:t>Technopreneurship · S1 Bisnis Digital Sem 3 · Sub-CPMK 1.2</a:t>
+              <a:t>Technopreneurship · Bisnis Digital Sem 3 · Sub-CPMK 1.2</a:t>
             </a:r>
           </a:p>
         </p:txBody>
@@ -8509,13 +8508,13 @@
           <a:p>
             <a:pPr algn="l"/>
             <a:r>
-              <a:rPr sz="2800" b="1">
+              <a:rPr sz="2600" b="1">
                 <a:solidFill>
                   <a:srgbClr val="0F2C4C"/>
                 </a:solidFill>
                 <a:latin typeface="Calibri"/>
               </a:rPr>
-              <a:t>Aktivitas kelas (±35 menit)</a:t>
+              <a:t>Aktivitas kelompok (±35 menit)</a:t>
             </a:r>
           </a:p>
         </p:txBody>
@@ -8550,7 +8549,7 @@
                 </a:solidFill>
                 <a:latin typeface="Calibri"/>
               </a:rPr>
-              <a:t>Kelompok: pilih teknologi yang tepat</a:t>
+              <a:t>Pilih teknologi dengan alasan yang manusiawi</a:t>
             </a:r>
           </a:p>
         </p:txBody>
@@ -8585,7 +8584,7 @@
                 </a:solidFill>
                 <a:latin typeface="Calibri"/>
               </a:rPr>
-              <a:t>Pilih 1 masalah dari pertemuan sebelumnya, lalu isi tabel berikut:</a:t>
+              <a:t>Ambil 1 masalah nyata, lalu isi lima kolom ini di kertas/HP:</a:t>
             </a:r>
           </a:p>
         </p:txBody>
@@ -8642,7 +8641,7 @@
         <p:spPr>
           <a:xfrm>
             <a:off x="640080" y="2011680"/>
-            <a:ext cx="2057400" cy="640080"/>
+            <a:ext cx="2057400" cy="777240"/>
           </a:xfrm>
           <a:prstGeom prst="rect">
             <a:avLst/>
@@ -8685,7 +8684,7 @@
         <p:spPr>
           <a:xfrm>
             <a:off x="685800" y="2103120"/>
-            <a:ext cx="1965960" cy="502920"/>
+            <a:ext cx="1965960" cy="640080"/>
           </a:xfrm>
           <a:prstGeom prst="rect">
             <a:avLst/>
@@ -8700,13 +8699,13 @@
           <a:p>
             <a:pPr algn="ctr"/>
             <a:r>
-              <a:rPr sz="1100" b="1">
+              <a:rPr sz="1200" b="1">
                 <a:solidFill>
                   <a:srgbClr val="FFFFFF"/>
                 </a:solidFill>
                 <a:latin typeface="Calibri"/>
               </a:rPr>
-              <a:t>Masalah</a:t>
+              <a:t>Masalah orang</a:t>
             </a:r>
           </a:p>
         </p:txBody>
@@ -8719,8 +8718,8 @@
         </p:nvSpPr>
         <p:spPr>
           <a:xfrm>
-            <a:off x="640080" y="2788920"/>
-            <a:ext cx="2057400" cy="1828800"/>
+            <a:off x="640080" y="2926080"/>
+            <a:ext cx="2057400" cy="1737360"/>
           </a:xfrm>
           <a:prstGeom prst="rect">
             <a:avLst/>
@@ -8762,8 +8761,8 @@
         </p:nvSpPr>
         <p:spPr>
           <a:xfrm>
-            <a:off x="731519" y="3017520"/>
-            <a:ext cx="1874519" cy="1371600"/>
+            <a:off x="731519" y="3383280"/>
+            <a:ext cx="1874519" cy="914400"/>
           </a:xfrm>
           <a:prstGeom prst="rect">
             <a:avLst/>
@@ -8784,7 +8783,7 @@
                 </a:solidFill>
                 <a:latin typeface="Calibri"/>
               </a:rPr>
-              <a:t>Isi di sini…</a:t>
+              <a:t>Tulis di sini</a:t>
             </a:r>
           </a:p>
         </p:txBody>
@@ -8798,7 +8797,7 @@
         <p:spPr>
           <a:xfrm>
             <a:off x="2834639" y="2011680"/>
-            <a:ext cx="2057400" cy="640080"/>
+            <a:ext cx="2057400" cy="777240"/>
           </a:xfrm>
           <a:prstGeom prst="rect">
             <a:avLst/>
@@ -8841,7 +8840,7 @@
         <p:spPr>
           <a:xfrm>
             <a:off x="2880359" y="2103120"/>
-            <a:ext cx="1965960" cy="502920"/>
+            <a:ext cx="1965960" cy="640080"/>
           </a:xfrm>
           <a:prstGeom prst="rect">
             <a:avLst/>
@@ -8856,13 +8855,13 @@
           <a:p>
             <a:pPr algn="ctr"/>
             <a:r>
-              <a:rPr sz="1100" b="1">
+              <a:rPr sz="1200" b="1">
                 <a:solidFill>
                   <a:srgbClr val="FFFFFF"/>
                 </a:solidFill>
                 <a:latin typeface="Calibri"/>
               </a:rPr>
-              <a:t>Pengguna</a:t>
+              <a:t>Siapa yang dibantu</a:t>
             </a:r>
           </a:p>
         </p:txBody>
@@ -8875,8 +8874,8 @@
         </p:nvSpPr>
         <p:spPr>
           <a:xfrm>
-            <a:off x="2834639" y="2788920"/>
-            <a:ext cx="2057400" cy="1828800"/>
+            <a:off x="2834639" y="2926080"/>
+            <a:ext cx="2057400" cy="1737360"/>
           </a:xfrm>
           <a:prstGeom prst="rect">
             <a:avLst/>
@@ -8918,8 +8917,8 @@
         </p:nvSpPr>
         <p:spPr>
           <a:xfrm>
-            <a:off x="2926079" y="3017520"/>
-            <a:ext cx="1874519" cy="1371600"/>
+            <a:off x="2926079" y="3383280"/>
+            <a:ext cx="1874519" cy="914400"/>
           </a:xfrm>
           <a:prstGeom prst="rect">
             <a:avLst/>
@@ -8940,7 +8939,7 @@
                 </a:solidFill>
                 <a:latin typeface="Calibri"/>
               </a:rPr>
-              <a:t>Isi di sini…</a:t>
+              <a:t>Tulis di sini</a:t>
             </a:r>
           </a:p>
         </p:txBody>
@@ -8954,7 +8953,7 @@
         <p:spPr>
           <a:xfrm>
             <a:off x="5029200" y="2011680"/>
-            <a:ext cx="2057400" cy="640080"/>
+            <a:ext cx="2057400" cy="777240"/>
           </a:xfrm>
           <a:prstGeom prst="rect">
             <a:avLst/>
@@ -8997,7 +8996,7 @@
         <p:spPr>
           <a:xfrm>
             <a:off x="5074920" y="2103120"/>
-            <a:ext cx="1965960" cy="502920"/>
+            <a:ext cx="1965960" cy="640080"/>
           </a:xfrm>
           <a:prstGeom prst="rect">
             <a:avLst/>
@@ -9012,13 +9011,13 @@
           <a:p>
             <a:pPr algn="ctr"/>
             <a:r>
-              <a:rPr sz="1100" b="1">
+              <a:rPr sz="1200" b="1">
                 <a:solidFill>
                   <a:srgbClr val="FFFFFF"/>
                 </a:solidFill>
                 <a:latin typeface="Calibri"/>
               </a:rPr>
-              <a:t>Solusi non-teknologi</a:t>
+              <a:t>Cara tanpa teknologi</a:t>
             </a:r>
           </a:p>
         </p:txBody>
@@ -9031,8 +9030,8 @@
         </p:nvSpPr>
         <p:spPr>
           <a:xfrm>
-            <a:off x="5029200" y="2788920"/>
-            <a:ext cx="2057400" cy="1828800"/>
+            <a:off x="5029200" y="2926080"/>
+            <a:ext cx="2057400" cy="1737360"/>
           </a:xfrm>
           <a:prstGeom prst="rect">
             <a:avLst/>
@@ -9074,8 +9073,8 @@
         </p:nvSpPr>
         <p:spPr>
           <a:xfrm>
-            <a:off x="5120640" y="3017520"/>
-            <a:ext cx="1874519" cy="1371600"/>
+            <a:off x="5120640" y="3383280"/>
+            <a:ext cx="1874519" cy="914400"/>
           </a:xfrm>
           <a:prstGeom prst="rect">
             <a:avLst/>
@@ -9096,7 +9095,7 @@
                 </a:solidFill>
                 <a:latin typeface="Calibri"/>
               </a:rPr>
-              <a:t>Isi di sini…</a:t>
+              <a:t>Tulis di sini</a:t>
             </a:r>
           </a:p>
         </p:txBody>
@@ -9110,7 +9109,7 @@
         <p:spPr>
           <a:xfrm>
             <a:off x="7223759" y="2011680"/>
-            <a:ext cx="2057400" cy="640080"/>
+            <a:ext cx="2057400" cy="777240"/>
           </a:xfrm>
           <a:prstGeom prst="rect">
             <a:avLst/>
@@ -9153,7 +9152,7 @@
         <p:spPr>
           <a:xfrm>
             <a:off x="7269479" y="2103120"/>
-            <a:ext cx="1965960" cy="502920"/>
+            <a:ext cx="1965960" cy="640080"/>
           </a:xfrm>
           <a:prstGeom prst="rect">
             <a:avLst/>
@@ -9168,13 +9167,13 @@
           <a:p>
             <a:pPr algn="ctr"/>
             <a:r>
-              <a:rPr sz="1100" b="1">
+              <a:rPr sz="1200" b="1">
                 <a:solidFill>
                   <a:srgbClr val="FFFFFF"/>
                 </a:solidFill>
                 <a:latin typeface="Calibri"/>
               </a:rPr>
-              <a:t>Solusi digital sederhana</a:t>
+              <a:t>Cara digital sederhana</a:t>
             </a:r>
           </a:p>
         </p:txBody>
@@ -9187,8 +9186,8 @@
         </p:nvSpPr>
         <p:spPr>
           <a:xfrm>
-            <a:off x="7223759" y="2788920"/>
-            <a:ext cx="2057400" cy="1828800"/>
+            <a:off x="7223759" y="2926080"/>
+            <a:ext cx="2057400" cy="1737360"/>
           </a:xfrm>
           <a:prstGeom prst="rect">
             <a:avLst/>
@@ -9230,8 +9229,8 @@
         </p:nvSpPr>
         <p:spPr>
           <a:xfrm>
-            <a:off x="7315199" y="3017520"/>
-            <a:ext cx="1874519" cy="1371600"/>
+            <a:off x="7315199" y="3383280"/>
+            <a:ext cx="1874519" cy="914400"/>
           </a:xfrm>
           <a:prstGeom prst="rect">
             <a:avLst/>
@@ -9252,7 +9251,7 @@
                 </a:solidFill>
                 <a:latin typeface="Calibri"/>
               </a:rPr>
-              <a:t>Isi di sini…</a:t>
+              <a:t>Tulis di sini</a:t>
             </a:r>
           </a:p>
         </p:txBody>
@@ -9266,7 +9265,7 @@
         <p:spPr>
           <a:xfrm>
             <a:off x="9418319" y="2011680"/>
-            <a:ext cx="2057400" cy="640080"/>
+            <a:ext cx="2057400" cy="777240"/>
           </a:xfrm>
           <a:prstGeom prst="rect">
             <a:avLst/>
@@ -9309,7 +9308,7 @@
         <p:spPr>
           <a:xfrm>
             <a:off x="9464040" y="2103120"/>
-            <a:ext cx="1965960" cy="502920"/>
+            <a:ext cx="1965960" cy="640080"/>
           </a:xfrm>
           <a:prstGeom prst="rect">
             <a:avLst/>
@@ -9324,13 +9323,13 @@
           <a:p>
             <a:pPr algn="ctr"/>
             <a:r>
-              <a:rPr sz="1100" b="1">
+              <a:rPr sz="1200" b="1">
                 <a:solidFill>
                   <a:srgbClr val="FFFFFF"/>
                 </a:solidFill>
                 <a:latin typeface="Calibri"/>
               </a:rPr>
-              <a:t>Teknologi lanjutan (opsional)</a:t>
+              <a:t>Teknologi lanjut (opsional)</a:t>
             </a:r>
           </a:p>
         </p:txBody>
@@ -9343,8 +9342,8 @@
         </p:nvSpPr>
         <p:spPr>
           <a:xfrm>
-            <a:off x="9418319" y="2788920"/>
-            <a:ext cx="2057400" cy="1828800"/>
+            <a:off x="9418319" y="2926080"/>
+            <a:ext cx="2057400" cy="1737360"/>
           </a:xfrm>
           <a:prstGeom prst="rect">
             <a:avLst/>
@@ -9386,8 +9385,8 @@
         </p:nvSpPr>
         <p:spPr>
           <a:xfrm>
-            <a:off x="9509759" y="3017520"/>
-            <a:ext cx="1874519" cy="1371600"/>
+            <a:off x="9509759" y="3383280"/>
+            <a:ext cx="1874519" cy="914400"/>
           </a:xfrm>
           <a:prstGeom prst="rect">
             <a:avLst/>
@@ -9408,7 +9407,7 @@
                 </a:solidFill>
                 <a:latin typeface="Calibri"/>
               </a:rPr>
-              <a:t>Isi di sini…</a:t>
+              <a:t>Tulis di sini</a:t>
             </a:r>
           </a:p>
         </p:txBody>
@@ -9443,7 +9442,7 @@
                 </a:solidFill>
                 <a:latin typeface="Calibri"/>
               </a:rPr>
-              <a:t>Presentasi cepat 1 menit per kelompok: fokus alasan memilih teknologi.</a:t>
+              <a:t>Presentasi 1 menit: ceritakan alasan pilihan Anda, bukan daftar istilah.</a:t>
             </a:r>
           </a:p>
         </p:txBody>
@@ -9478,7 +9477,7 @@
                 </a:solidFill>
                 <a:latin typeface="Calibri"/>
               </a:rPr>
-              <a:t>Technopreneurship · S1 Bisnis Digital Sem 3 · Sub-CPMK 1.2</a:t>
+              <a:t>Technopreneurship · Bisnis Digital Sem 3 · Sub-CPMK 1.2</a:t>
             </a:r>
           </a:p>
         </p:txBody>
@@ -9646,13 +9645,13 @@
           <a:p>
             <a:pPr algn="l"/>
             <a:r>
-              <a:rPr sz="2800" b="1">
+              <a:rPr sz="2600" b="1">
                 <a:solidFill>
                   <a:srgbClr val="0F2C4C"/>
                 </a:solidFill>
                 <a:latin typeface="Calibri"/>
               </a:rPr>
-              <a:t>Ringkasan Sub-CPMK 1.2</a:t>
+              <a:t>Simpulan yang bisa dibawa pulang</a:t>
             </a:r>
           </a:p>
         </p:txBody>
@@ -9687,7 +9686,7 @@
                 </a:solidFill>
                 <a:latin typeface="Calibri"/>
               </a:rPr>
-              <a:t>Empat kalimat kunci</a:t>
+              <a:t>Empat kalimat hangat</a:t>
             </a:r>
           </a:p>
         </p:txBody>
@@ -9743,7 +9742,7 @@
         </p:nvSpPr>
         <p:spPr>
           <a:xfrm>
-            <a:off x="822959" y="1645919"/>
+            <a:off x="822959" y="1691640"/>
             <a:ext cx="4937760" cy="411480"/>
           </a:xfrm>
           <a:prstGeom prst="rect">
@@ -9778,8 +9777,8 @@
         </p:nvSpPr>
         <p:spPr>
           <a:xfrm>
-            <a:off x="822959" y="2240280"/>
-            <a:ext cx="4937760" cy="822960"/>
+            <a:off x="822959" y="2286000"/>
+            <a:ext cx="4937760" cy="731520"/>
           </a:xfrm>
           <a:prstGeom prst="rect">
             <a:avLst/>
@@ -9800,7 +9799,7 @@
                 </a:solidFill>
                 <a:latin typeface="Calibri"/>
               </a:rPr>
-              <a:t>Mempertemukan banyak pihak dan tumbuh lewat jaringan.</a:t>
+              <a:t>Tempat orang bertemu orang agar saling terbantu.</a:t>
             </a:r>
           </a:p>
         </p:txBody>
@@ -9856,7 +9855,7 @@
         </p:nvSpPr>
         <p:spPr>
           <a:xfrm>
-            <a:off x="6583679" y="1645919"/>
+            <a:off x="6583679" y="1691640"/>
             <a:ext cx="4937760" cy="411480"/>
           </a:xfrm>
           <a:prstGeom prst="rect">
@@ -9878,7 +9877,7 @@
                 </a:solidFill>
                 <a:latin typeface="Calibri"/>
               </a:rPr>
-              <a:t>Fintech</a:t>
+              <a:t>Pembayaran digital</a:t>
             </a:r>
           </a:p>
         </p:txBody>
@@ -9891,8 +9890,8 @@
         </p:nvSpPr>
         <p:spPr>
           <a:xfrm>
-            <a:off x="6583679" y="2240280"/>
-            <a:ext cx="4937760" cy="822960"/>
+            <a:off x="6583679" y="2286000"/>
+            <a:ext cx="4937760" cy="731520"/>
           </a:xfrm>
           <a:prstGeom prst="rect">
             <a:avLst/>
@@ -9913,7 +9912,7 @@
                 </a:solidFill>
                 <a:latin typeface="Calibri"/>
               </a:rPr>
-              <a:t>Memperlancar pembayaran, pinjaman, dan pencatatan.</a:t>
+              <a:t>Membuat bayar dan mencatat terasa lebih ringan.</a:t>
             </a:r>
           </a:p>
         </p:txBody>
@@ -9969,7 +9968,7 @@
         </p:nvSpPr>
         <p:spPr>
           <a:xfrm>
-            <a:off x="822959" y="3931920"/>
+            <a:off x="822959" y="3977640"/>
             <a:ext cx="4937760" cy="411480"/>
           </a:xfrm>
           <a:prstGeom prst="rect">
@@ -10004,8 +10003,8 @@
         </p:nvSpPr>
         <p:spPr>
           <a:xfrm>
-            <a:off x="822959" y="4526280"/>
-            <a:ext cx="4937760" cy="822960"/>
+            <a:off x="822959" y="4572000"/>
+            <a:ext cx="4937760" cy="731520"/>
           </a:xfrm>
           <a:prstGeom prst="rect">
             <a:avLst/>
@@ -10026,7 +10025,7 @@
                 </a:solidFill>
                 <a:latin typeface="Calibri"/>
               </a:rPr>
-              <a:t>Membantu pola, rekomendasi, dan otomasi tugas.</a:t>
+              <a:t>Asisten untuk kerja berulang dan memberi saran.</a:t>
             </a:r>
           </a:p>
         </p:txBody>
@@ -10082,7 +10081,7 @@
         </p:nvSpPr>
         <p:spPr>
           <a:xfrm>
-            <a:off x="6583679" y="3931920"/>
+            <a:off x="6583679" y="3977640"/>
             <a:ext cx="4937760" cy="411480"/>
           </a:xfrm>
           <a:prstGeom prst="rect">
@@ -10117,8 +10116,8 @@
         </p:nvSpPr>
         <p:spPr>
           <a:xfrm>
-            <a:off x="6583679" y="4526280"/>
-            <a:ext cx="4937760" cy="822960"/>
+            <a:off x="6583679" y="4572000"/>
+            <a:ext cx="4937760" cy="731520"/>
           </a:xfrm>
           <a:prstGeom prst="rect">
             <a:avLst/>
@@ -10139,7 +10138,7 @@
                 </a:solidFill>
                 <a:latin typeface="Calibri"/>
               </a:rPr>
-              <a:t>Mengambil data dari perangkat fisik untuk keputusan bisnis.</a:t>
+              <a:t>Benda nyata yang memberi kabar lewat data.</a:t>
             </a:r>
           </a:p>
         </p:txBody>
@@ -10174,7 +10173,7 @@
                 </a:solidFill>
                 <a:latin typeface="Calibri"/>
               </a:rPr>
-              <a:t>Technopreneurship · S1 Bisnis Digital Sem 3 · Sub-CPMK 1.2</a:t>
+              <a:t>Technopreneurship · Bisnis Digital Sem 3 · Sub-CPMK 1.2</a:t>
             </a:r>
           </a:p>
         </p:txBody>
@@ -10342,13 +10341,13 @@
           <a:p>
             <a:pPr algn="l"/>
             <a:r>
-              <a:rPr sz="2800" b="1">
+              <a:rPr sz="2600" b="1">
                 <a:solidFill>
                   <a:srgbClr val="0F2C4C"/>
                 </a:solidFill>
                 <a:latin typeface="Calibri"/>
               </a:rPr>
-              <a:t>Tugas, referensi &amp; penutup</a:t>
+              <a:t>Tugas &amp; penutup</a:t>
             </a:r>
           </a:p>
         </p:txBody>
@@ -10383,7 +10382,7 @@
                 </a:solidFill>
                 <a:latin typeface="Calibri"/>
               </a:rPr>
-              <a:t>Persiapan ideasi (Sub-CPMK 2.1)</a:t>
+              <a:t>Langkah kecil sebelum ideasi</a:t>
             </a:r>
           </a:p>
         </p:txBody>
@@ -10397,7 +10396,7 @@
         <p:spPr>
           <a:xfrm>
             <a:off x="548640" y="1325880"/>
-            <a:ext cx="11064240" cy="2103120"/>
+            <a:ext cx="11064240" cy="2286000"/>
           </a:xfrm>
           <a:prstGeom prst="roundRect">
             <a:avLst/>
@@ -10439,7 +10438,7 @@
         </p:nvSpPr>
         <p:spPr>
           <a:xfrm>
-            <a:off x="868680" y="1508760"/>
+            <a:off x="868680" y="1554480"/>
             <a:ext cx="10424160" cy="365760"/>
           </a:xfrm>
           <a:prstGeom prst="rect">
@@ -10461,7 +10460,7 @@
                 </a:solidFill>
                 <a:latin typeface="Calibri"/>
               </a:rPr>
-              <a:t>Tugas / persiapan</a:t>
+              <a:t>Untuk pertemuan berikutnya:</a:t>
             </a:r>
           </a:p>
         </p:txBody>
@@ -10474,8 +10473,8 @@
         </p:nvSpPr>
         <p:spPr>
           <a:xfrm>
-            <a:off x="868680" y="1965960"/>
-            <a:ext cx="10424160" cy="1188720"/>
+            <a:off x="868680" y="2057400"/>
+            <a:ext cx="10424160" cy="1280160"/>
           </a:xfrm>
           <a:prstGeom prst="rect">
             <a:avLst/>
@@ -10500,7 +10499,7 @@
                 </a:solidFill>
                 <a:latin typeface="Calibri"/>
               </a:rPr>
-              <a:t>• Bawa daftar 10 masalah di sekitar Anda (boleh gabungan tugas lama).</a:t>
+              <a:t>• Tuliskan 10 kesulitan orang di sekitar Anda.</a:t>
             </a:r>
           </a:p>
           <a:p>
@@ -10516,7 +10515,7 @@
                 </a:solidFill>
                 <a:latin typeface="Calibri"/>
               </a:rPr>
-              <a:t>• Untuk 3 masalah terbaik, tulis: pengguna + solusi paling sederhana + apakah perlu AI/IoT/platform/fintech.</a:t>
+              <a:t>• Pilih 3 yang paling sering terjadi. Untuk tiap masalah: siapa yang dibantu, cara paling sederhana, dan apakah perlu platform/pembayaran digital/AI/IoT.</a:t>
             </a:r>
           </a:p>
         </p:txBody>
@@ -10529,14 +10528,14 @@
         </p:nvSpPr>
         <p:spPr>
           <a:xfrm>
-            <a:off x="548640" y="3657600"/>
-            <a:ext cx="11064240" cy="2011680"/>
+            <a:off x="548640" y="3840480"/>
+            <a:ext cx="11064240" cy="1828800"/>
           </a:xfrm>
           <a:prstGeom prst="roundRect">
             <a:avLst/>
           </a:prstGeom>
           <a:solidFill>
-            <a:srgbClr val="FFFFFF"/>
+            <a:srgbClr val="0F2C4C"/>
           </a:solidFill>
           <a:ln>
             <a:noFill/>
@@ -10572,29 +10571,29 @@
         </p:nvSpPr>
         <p:spPr>
           <a:xfrm>
-            <a:off x="868680" y="3840480"/>
-            <a:ext cx="10424160" cy="320040"/>
-          </a:xfrm>
-          <a:prstGeom prst="rect">
-            <a:avLst/>
-          </a:prstGeom>
-          <a:noFill/>
-        </p:spPr>
-        <p:txBody>
-          <a:bodyPr wrap="square">
-            <a:spAutoFit/>
-          </a:bodyPr>
-          <a:lstStyle/>
-          <a:p>
-            <a:pPr algn="l"/>
-            <a:r>
-              <a:rPr sz="1600" b="1">
-                <a:solidFill>
-                  <a:srgbClr val="1A6B6B"/>
-                </a:solidFill>
-                <a:latin typeface="Calibri"/>
-              </a:rPr>
-              <a:t>Referensi</a:t>
+            <a:off x="868680" y="4206240"/>
+            <a:ext cx="10424160" cy="1097280"/>
+          </a:xfrm>
+          <a:prstGeom prst="rect">
+            <a:avLst/>
+          </a:prstGeom>
+          <a:noFill/>
+        </p:spPr>
+        <p:txBody>
+          <a:bodyPr wrap="square">
+            <a:spAutoFit/>
+          </a:bodyPr>
+          <a:lstStyle/>
+          <a:p>
+            <a:pPr algn="ctr"/>
+            <a:r>
+              <a:rPr sz="2200" b="1">
+                <a:solidFill>
+                  <a:srgbClr val="FFFFFF"/>
+                </a:solidFill>
+                <a:latin typeface="Calibri"/>
+              </a:rPr>
+              <a:t>Teknologi adalah alat. Kepedulian pada manusia adalah arahnya.</a:t>
             </a:r>
           </a:p>
         </p:txBody>
@@ -10602,77 +10601,6 @@
       <p:sp>
         <p:nvSpPr>
           <p:cNvPr id="11" name="TextBox 10"/>
-          <p:cNvSpPr txBox="1"/>
-          <p:nvPr/>
-        </p:nvSpPr>
-        <p:spPr>
-          <a:xfrm>
-            <a:off x="868680" y="4251960"/>
-            <a:ext cx="10424160" cy="1188720"/>
-          </a:xfrm>
-          <a:prstGeom prst="rect">
-            <a:avLst/>
-          </a:prstGeom>
-          <a:noFill/>
-        </p:spPr>
-        <p:txBody>
-          <a:bodyPr wrap="square">
-            <a:spAutoFit/>
-          </a:bodyPr>
-          <a:lstStyle/>
-          <a:p>
-            <a:pPr algn="l">
-              <a:spcAft>
-                <a:spcPts val="600"/>
-              </a:spcAft>
-            </a:pPr>
-            <a:r>
-              <a:rPr sz="1500" b="0">
-                <a:solidFill>
-                  <a:srgbClr val="1C1C1C"/>
-                </a:solidFill>
-                <a:latin typeface="Calibri"/>
-              </a:rPr>
-              <a:t>• Sulistyandari. Technopreneurship: Membangun Bisnis Berbasis Teknologi. Penerbit Adab.</a:t>
-            </a:r>
-          </a:p>
-          <a:p>
-            <a:pPr algn="l">
-              <a:spcAft>
-                <a:spcPts val="600"/>
-              </a:spcAft>
-            </a:pPr>
-            <a:r>
-              <a:rPr sz="1500" b="0">
-                <a:solidFill>
-                  <a:srgbClr val="1C1C1C"/>
-                </a:solidFill>
-                <a:latin typeface="Calibri"/>
-              </a:rPr>
-              <a:t>• Naskah kelas: materi-technopreneurship/naskah/P04_teknologi_untuk_bisnis.md</a:t>
-            </a:r>
-          </a:p>
-          <a:p>
-            <a:pPr algn="l">
-              <a:spcAft>
-                <a:spcPts val="600"/>
-              </a:spcAft>
-            </a:pPr>
-            <a:r>
-              <a:rPr sz="1500" b="0">
-                <a:solidFill>
-                  <a:srgbClr val="1C1C1C"/>
-                </a:solidFill>
-                <a:latin typeface="Calibri"/>
-              </a:rPr>
-              <a:t>• Pesan penutup: Teknologi = alat. Pilih yang menyelesaikan masalah.</a:t>
-            </a:r>
-          </a:p>
-        </p:txBody>
-      </p:sp>
-      <p:sp>
-        <p:nvSpPr>
-          <p:cNvPr id="12" name="TextBox 11"/>
           <p:cNvSpPr txBox="1"/>
           <p:nvPr/>
         </p:nvSpPr>
@@ -10700,14 +10628,14 @@
                 </a:solidFill>
                 <a:latin typeface="Calibri"/>
               </a:rPr>
-              <a:t>Technopreneurship · S1 Bisnis Digital Sem 3 · Sub-CPMK 1.2</a:t>
-            </a:r>
-          </a:p>
-        </p:txBody>
-      </p:sp>
-      <p:sp>
-        <p:nvSpPr>
-          <p:cNvPr id="13" name="TextBox 12"/>
+              <a:t>Technopreneurship · Bisnis Digital Sem 3 · Sub-CPMK 1.2</a:t>
+            </a:r>
+          </a:p>
+        </p:txBody>
+      </p:sp>
+      <p:sp>
+        <p:nvSpPr>
+          <p:cNvPr id="12" name="TextBox 11"/>
           <p:cNvSpPr txBox="1"/>
           <p:nvPr/>
         </p:nvSpPr>
@@ -10868,13 +10796,13 @@
           <a:p>
             <a:pPr algn="l"/>
             <a:r>
-              <a:rPr sz="2800" b="1">
+              <a:rPr sz="2600" b="1">
                 <a:solidFill>
                   <a:srgbClr val="0F2C4C"/>
                 </a:solidFill>
                 <a:latin typeface="Calibri"/>
               </a:rPr>
-              <a:t>Capaian Pembelajaran</a:t>
+              <a:t>Hari ini kita belajar memilih, bukan menghafal</a:t>
             </a:r>
           </a:p>
         </p:txBody>
@@ -10909,7 +10837,7 @@
                 </a:solidFill>
                 <a:latin typeface="Calibri"/>
               </a:rPr>
-              <a:t>CPMK-1 dan Sub-CPMK 1.2</a:t>
+              <a:t>Teknologi ada untuk menolong orang—bukan untuk membingungkan mahasiswa</a:t>
             </a:r>
           </a:p>
         </p:txBody>
@@ -10923,7 +10851,7 @@
         <p:spPr>
           <a:xfrm>
             <a:off x="548640" y="1371600"/>
-            <a:ext cx="11064240" cy="1280160"/>
+            <a:ext cx="11064240" cy="4389120"/>
           </a:xfrm>
           <a:prstGeom prst="roundRect">
             <a:avLst/>
@@ -10965,8 +10893,8 @@
         </p:nvSpPr>
         <p:spPr>
           <a:xfrm>
-            <a:off x="822960" y="1508760"/>
-            <a:ext cx="10515600" cy="274320"/>
+            <a:off x="914400" y="1691640"/>
+            <a:ext cx="10332720" cy="411480"/>
           </a:xfrm>
           <a:prstGeom prst="rect">
             <a:avLst/>
@@ -10981,13 +10909,13 @@
           <a:p>
             <a:pPr algn="l"/>
             <a:r>
-              <a:rPr sz="1400" b="1">
-                <a:solidFill>
-                  <a:srgbClr val="1A6B6B"/>
-                </a:solidFill>
-                <a:latin typeface="Calibri"/>
-              </a:rPr>
-              <a:t>CPMK-1</a:t>
+              <a:rPr sz="1800" b="1">
+                <a:solidFill>
+                  <a:srgbClr val="0F2C4C"/>
+                </a:solidFill>
+                <a:latin typeface="Calibri"/>
+              </a:rPr>
+              <a:t>Setelah pertemuan ini, Anda bisa:</a:t>
             </a:r>
           </a:p>
         </p:txBody>
@@ -11000,156 +10928,8 @@
         </p:nvSpPr>
         <p:spPr>
           <a:xfrm>
-            <a:off x="822960" y="1874519"/>
-            <a:ext cx="10515600" cy="548640"/>
-          </a:xfrm>
-          <a:prstGeom prst="rect">
-            <a:avLst/>
-          </a:prstGeom>
-          <a:noFill/>
-        </p:spPr>
-        <p:txBody>
-          <a:bodyPr wrap="square">
-            <a:spAutoFit/>
-          </a:bodyPr>
-          <a:lstStyle/>
-          <a:p>
-            <a:pPr algn="l"/>
-            <a:r>
-              <a:rPr sz="1700" b="0">
-                <a:solidFill>
-                  <a:srgbClr val="1C1C1C"/>
-                </a:solidFill>
-                <a:latin typeface="Calibri"/>
-              </a:rPr>
-              <a:t>Mahasiswa mampu menjelaskan konsep dasar entrepreneurship, technopreneurship, dan ekosistem bisnis digital Indonesia.</a:t>
-            </a:r>
-          </a:p>
-        </p:txBody>
-      </p:sp>
-      <p:sp>
-        <p:nvSpPr>
-          <p:cNvPr id="9" name="Rounded Rectangle 8"/>
-          <p:cNvSpPr/>
-          <p:nvPr/>
-        </p:nvSpPr>
-        <p:spPr>
-          <a:xfrm>
-            <a:off x="548640" y="2926080"/>
-            <a:ext cx="11064240" cy="2560320"/>
-          </a:xfrm>
-          <a:prstGeom prst="roundRect">
-            <a:avLst/>
-          </a:prstGeom>
-          <a:solidFill>
-            <a:srgbClr val="FFFFFF"/>
-          </a:solidFill>
-          <a:ln>
-            <a:noFill/>
-          </a:ln>
-        </p:spPr>
-        <p:style>
-          <a:lnRef idx="1">
-            <a:schemeClr val="accent1"/>
-          </a:lnRef>
-          <a:fillRef idx="3">
-            <a:schemeClr val="accent1"/>
-          </a:fillRef>
-          <a:effectRef idx="2">
-            <a:schemeClr val="accent1"/>
-          </a:effectRef>
-          <a:fontRef idx="minor">
-            <a:schemeClr val="lt1"/>
-          </a:fontRef>
-        </p:style>
-        <p:txBody>
-          <a:bodyPr rtlCol="0" anchor="ctr"/>
-          <a:lstStyle/>
-          <a:p>
-            <a:pPr algn="ctr"/>
-          </a:p>
-        </p:txBody>
-      </p:sp>
-      <p:sp>
-        <p:nvSpPr>
-          <p:cNvPr id="10" name="TextBox 9"/>
-          <p:cNvSpPr txBox="1"/>
-          <p:nvPr/>
-        </p:nvSpPr>
-        <p:spPr>
-          <a:xfrm>
-            <a:off x="822960" y="3108960"/>
-            <a:ext cx="10515600" cy="320040"/>
-          </a:xfrm>
-          <a:prstGeom prst="rect">
-            <a:avLst/>
-          </a:prstGeom>
-          <a:noFill/>
-        </p:spPr>
-        <p:txBody>
-          <a:bodyPr wrap="square">
-            <a:spAutoFit/>
-          </a:bodyPr>
-          <a:lstStyle/>
-          <a:p>
-            <a:pPr algn="l"/>
-            <a:r>
-              <a:rPr sz="1400" b="1">
-                <a:solidFill>
-                  <a:srgbClr val="D97B2A"/>
-                </a:solidFill>
-                <a:latin typeface="Calibri"/>
-              </a:rPr>
-              <a:t>Sub-CPMK 1.2 (fokus pertemuan ini)</a:t>
-            </a:r>
-          </a:p>
-        </p:txBody>
-      </p:sp>
-      <p:sp>
-        <p:nvSpPr>
-          <p:cNvPr id="11" name="TextBox 10"/>
-          <p:cNvSpPr txBox="1"/>
-          <p:nvPr/>
-        </p:nvSpPr>
-        <p:spPr>
-          <a:xfrm>
-            <a:off x="822960" y="3566160"/>
-            <a:ext cx="10515600" cy="502920"/>
-          </a:xfrm>
-          <a:prstGeom prst="rect">
-            <a:avLst/>
-          </a:prstGeom>
-          <a:noFill/>
-        </p:spPr>
-        <p:txBody>
-          <a:bodyPr wrap="square">
-            <a:spAutoFit/>
-          </a:bodyPr>
-          <a:lstStyle/>
-          <a:p>
-            <a:pPr algn="l"/>
-            <a:r>
-              <a:rPr sz="2000" b="1">
-                <a:solidFill>
-                  <a:srgbClr val="0F2C4C"/>
-                </a:solidFill>
-                <a:latin typeface="Calibri"/>
-              </a:rPr>
-              <a:t>Menjelaskan peran teknologi (AI, IoT, fintech, platform) dalam bisnis.</a:t>
-            </a:r>
-          </a:p>
-        </p:txBody>
-      </p:sp>
-      <p:sp>
-        <p:nvSpPr>
-          <p:cNvPr id="12" name="TextBox 11"/>
-          <p:cNvSpPr txBox="1"/>
-          <p:nvPr/>
-        </p:nvSpPr>
-        <p:spPr>
-          <a:xfrm>
-            <a:off x="822960" y="4206240"/>
-            <a:ext cx="10515600" cy="1005840"/>
+            <a:off x="914400" y="2286000"/>
+            <a:ext cx="10332720" cy="3017520"/>
           </a:xfrm>
           <a:prstGeom prst="rect">
             <a:avLst/>
@@ -11168,13 +10948,13 @@
               </a:spcAft>
             </a:pPr>
             <a:r>
-              <a:rPr sz="1500" b="0">
-                <a:solidFill>
-                  <a:srgbClr val="5A6570"/>
-                </a:solidFill>
-                <a:latin typeface="Calibri"/>
-              </a:rPr>
-              <a:t>Setelah kuliah ini, mahasiswa dapat:</a:t>
+              <a:rPr sz="1700" b="0">
+                <a:solidFill>
+                  <a:srgbClr val="1C1C1C"/>
+                </a:solidFill>
+                <a:latin typeface="Calibri"/>
+              </a:rPr>
+              <a:t>1. Menjelaskan empat jenis teknologi dengan contoh dari HP Anda sendiri.</a:t>
             </a:r>
           </a:p>
           <a:p>
@@ -11184,13 +10964,13 @@
               </a:spcAft>
             </a:pPr>
             <a:r>
-              <a:rPr sz="1500" b="0">
-                <a:solidFill>
-                  <a:srgbClr val="5A6570"/>
-                </a:solidFill>
-                <a:latin typeface="Calibri"/>
-              </a:rPr>
-              <a:t>1) menjelaskan empat jenis teknologi dengan contoh sehari-hari,</a:t>
+              <a:rPr sz="1700" b="0">
+                <a:solidFill>
+                  <a:srgbClr val="1C1C1C"/>
+                </a:solidFill>
+                <a:latin typeface="Calibri"/>
+              </a:rPr>
+              <a:t>2. Menjelaskan peran masing-masing dalam menolong pelanggan.</a:t>
             </a:r>
           </a:p>
           <a:p>
@@ -11200,13 +10980,13 @@
               </a:spcAft>
             </a:pPr>
             <a:r>
-              <a:rPr sz="1500" b="0">
-                <a:solidFill>
-                  <a:srgbClr val="5A6570"/>
-                </a:solidFill>
-                <a:latin typeface="Calibri"/>
-              </a:rPr>
-              <a:t>2) membedakan teknologi sebagai alat vs inti solusi,</a:t>
+              <a:rPr sz="1700" b="0">
+                <a:solidFill>
+                  <a:srgbClr val="1C1C1C"/>
+                </a:solidFill>
+                <a:latin typeface="Calibri"/>
+              </a:rPr>
+              <a:t>3. Memilih teknologi yang cocok untuk sebuah masalah—bukan karena “lagi hits”.</a:t>
             </a:r>
           </a:p>
           <a:p>
@@ -11216,20 +10996,36 @@
               </a:spcAft>
             </a:pPr>
             <a:r>
-              <a:rPr sz="1500" b="0">
-                <a:solidFill>
-                  <a:srgbClr val="5A6570"/>
-                </a:solidFill>
-                <a:latin typeface="Calibri"/>
-              </a:rPr>
-              <a:t>3) memilih teknologi yang relevan untuk sebuah masalah bisnis (bukan karena tren).</a:t>
-            </a:r>
-          </a:p>
-        </p:txBody>
-      </p:sp>
-      <p:sp>
-        <p:nvSpPr>
-          <p:cNvPr id="13" name="TextBox 12"/>
+              <a:rPr sz="1700" b="0">
+                <a:solidFill>
+                  <a:srgbClr val="1C1C1C"/>
+                </a:solidFill>
+                <a:latin typeface="Calibri"/>
+              </a:rPr>
+              <a:t/>
+            </a:r>
+          </a:p>
+          <a:p>
+            <a:pPr algn="l">
+              <a:spcAft>
+                <a:spcPts val="600"/>
+              </a:spcAft>
+            </a:pPr>
+            <a:r>
+              <a:rPr sz="1700" b="0">
+                <a:solidFill>
+                  <a:srgbClr val="1C1C1C"/>
+                </a:solidFill>
+                <a:latin typeface="Calibri"/>
+              </a:rPr>
+              <a:t>Kita tidak sedang jadi teknisi. Kita sedang jadi pemikir usaha yang waras.</a:t>
+            </a:r>
+          </a:p>
+        </p:txBody>
+      </p:sp>
+      <p:sp>
+        <p:nvSpPr>
+          <p:cNvPr id="9" name="TextBox 8"/>
           <p:cNvSpPr txBox="1"/>
           <p:nvPr/>
         </p:nvSpPr>
@@ -11257,14 +11053,14 @@
                 </a:solidFill>
                 <a:latin typeface="Calibri"/>
               </a:rPr>
-              <a:t>Technopreneurship · S1 Bisnis Digital Sem 3 · Sub-CPMK 1.2</a:t>
-            </a:r>
-          </a:p>
-        </p:txBody>
-      </p:sp>
-      <p:sp>
-        <p:nvSpPr>
-          <p:cNvPr id="14" name="TextBox 13"/>
+              <a:t>Technopreneurship · Bisnis Digital Sem 3 · Sub-CPMK 1.2</a:t>
+            </a:r>
+          </a:p>
+        </p:txBody>
+      </p:sp>
+      <p:sp>
+        <p:nvSpPr>
+          <p:cNvPr id="10" name="TextBox 9"/>
           <p:cNvSpPr txBox="1"/>
           <p:nvPr/>
         </p:nvSpPr>
@@ -11425,13 +11221,13 @@
           <a:p>
             <a:pPr algn="l"/>
             <a:r>
-              <a:rPr sz="2800" b="1">
+              <a:rPr sz="2600" b="1">
                 <a:solidFill>
                   <a:srgbClr val="0F2C4C"/>
                 </a:solidFill>
                 <a:latin typeface="Calibri"/>
               </a:rPr>
-              <a:t>Agenda Pertemuan</a:t>
+              <a:t>Alur belajar</a:t>
             </a:r>
           </a:p>
         </p:txBody>
@@ -11466,7 +11262,7 @@
                 </a:solidFill>
                 <a:latin typeface="Calibri"/>
               </a:rPr>
-              <a:t>Dari prinsip ke praktik memilih teknologi</a:t>
+              <a:t>Dari yang sudah Anda pakai → ke cara memilih</a:t>
             </a:r>
           </a:p>
         </p:txBody>
@@ -11538,7 +11334,7 @@
           <a:p>
             <a:pPr algn="ctr"/>
             <a:r>
-              <a:rPr sz="1800" b="1">
+              <a:rPr sz="1600" b="1">
                 <a:solidFill>
                   <a:srgbClr val="FFFFFF"/>
                 </a:solidFill>
@@ -11616,13 +11412,13 @@
           <a:p>
             <a:pPr algn="l"/>
             <a:r>
-              <a:rPr sz="1700" b="0">
+              <a:rPr sz="1600" b="0">
                 <a:solidFill>
                   <a:srgbClr val="1C1C1C"/>
                 </a:solidFill>
                 <a:latin typeface="Calibri"/>
               </a:rPr>
-              <a:t>Prinsip: teknologi sebagai enabler, bukan tujuan</a:t>
+              <a:t>Buka HP: aplikasi apa yang sering dipakai?</a:t>
             </a:r>
           </a:p>
         </p:txBody>
@@ -11694,7 +11490,7 @@
           <a:p>
             <a:pPr algn="ctr"/>
             <a:r>
-              <a:rPr sz="1800" b="1">
+              <a:rPr sz="1600" b="1">
                 <a:solidFill>
                   <a:srgbClr val="FFFFFF"/>
                 </a:solidFill>
@@ -11772,13 +11568,13 @@
           <a:p>
             <a:pPr algn="l"/>
             <a:r>
-              <a:rPr sz="1700" b="0">
+              <a:rPr sz="1600" b="0">
                 <a:solidFill>
                   <a:srgbClr val="1C1C1C"/>
                 </a:solidFill>
                 <a:latin typeface="Calibri"/>
               </a:rPr>
-              <a:t>Platform — tempat bertemunya banyak pihak</a:t>
+              <a:t>Platform: mempertemukan orang dengan orang</a:t>
             </a:r>
           </a:p>
         </p:txBody>
@@ -11850,7 +11646,7 @@
           <a:p>
             <a:pPr algn="ctr"/>
             <a:r>
-              <a:rPr sz="1800" b="1">
+              <a:rPr sz="1600" b="1">
                 <a:solidFill>
                   <a:srgbClr val="FFFFFF"/>
                 </a:solidFill>
@@ -11928,13 +11724,13 @@
           <a:p>
             <a:pPr algn="l"/>
             <a:r>
-              <a:rPr sz="1700" b="0">
+              <a:rPr sz="1600" b="0">
                 <a:solidFill>
                   <a:srgbClr val="1C1C1C"/>
                 </a:solidFill>
                 <a:latin typeface="Calibri"/>
               </a:rPr>
-              <a:t>Fintech — memudahkan transaksi &amp; pencatatan</a:t>
+              <a:t>Pembayaran digital: biar transaksi lebih mudah</a:t>
             </a:r>
           </a:p>
         </p:txBody>
@@ -12006,7 +11802,7 @@
           <a:p>
             <a:pPr algn="ctr"/>
             <a:r>
-              <a:rPr sz="1800" b="1">
+              <a:rPr sz="1600" b="1">
                 <a:solidFill>
                   <a:srgbClr val="FFFFFF"/>
                 </a:solidFill>
@@ -12084,13 +11880,13 @@
           <a:p>
             <a:pPr algn="l"/>
             <a:r>
-              <a:rPr sz="1700" b="0">
+              <a:rPr sz="1600" b="0">
                 <a:solidFill>
                   <a:srgbClr val="1C1C1C"/>
                 </a:solidFill>
                 <a:latin typeface="Calibri"/>
               </a:rPr>
-              <a:t>AI — rekomendasi, otomasi, pengenalan pola</a:t>
+              <a:t>AI: membantu kerja berulang &amp; rekomendasi</a:t>
             </a:r>
           </a:p>
         </p:txBody>
@@ -12162,7 +11958,7 @@
           <a:p>
             <a:pPr algn="ctr"/>
             <a:r>
-              <a:rPr sz="1800" b="1">
+              <a:rPr sz="1600" b="1">
                 <a:solidFill>
                   <a:srgbClr val="FFFFFF"/>
                 </a:solidFill>
@@ -12240,13 +12036,13 @@
           <a:p>
             <a:pPr algn="l"/>
             <a:r>
-              <a:rPr sz="1700" b="0">
+              <a:rPr sz="1600" b="0">
                 <a:solidFill>
                   <a:srgbClr val="1C1C1C"/>
                 </a:solidFill>
                 <a:latin typeface="Calibri"/>
               </a:rPr>
-              <a:t>IoT — perangkat fisik yang mengirim data</a:t>
+              <a:t>IoT: benda nyata yang “ngomong” lewat data</a:t>
             </a:r>
           </a:p>
         </p:txBody>
@@ -12318,7 +12114,7 @@
           <a:p>
             <a:pPr algn="ctr"/>
             <a:r>
-              <a:rPr sz="1800" b="1">
+              <a:rPr sz="1600" b="1">
                 <a:solidFill>
                   <a:srgbClr val="FFFFFF"/>
                 </a:solidFill>
@@ -12396,13 +12192,13 @@
           <a:p>
             <a:pPr algn="l"/>
             <a:r>
-              <a:rPr sz="1700" b="0">
+              <a:rPr sz="1600" b="0">
                 <a:solidFill>
                   <a:srgbClr val="1C1C1C"/>
                 </a:solidFill>
                 <a:latin typeface="Calibri"/>
               </a:rPr>
-              <a:t>Cek pemahaman + aktivitas pemilihan teknologi</a:t>
+              <a:t>Latihan pilih teknologi untuk 1 masalah nyata</a:t>
             </a:r>
           </a:p>
         </p:txBody>
@@ -12437,7 +12233,7 @@
                 </a:solidFill>
                 <a:latin typeface="Calibri"/>
               </a:rPr>
-              <a:t>Technopreneurship · S1 Bisnis Digital Sem 3 · Sub-CPMK 1.2</a:t>
+              <a:t>Technopreneurship · Bisnis Digital Sem 3 · Sub-CPMK 1.2</a:t>
             </a:r>
           </a:p>
         </p:txBody>
@@ -12605,13 +12401,13 @@
           <a:p>
             <a:pPr algn="l"/>
             <a:r>
-              <a:rPr sz="2800" b="1">
+              <a:rPr sz="2600" b="1">
                 <a:solidFill>
                   <a:srgbClr val="0F2C4C"/>
                 </a:solidFill>
                 <a:latin typeface="Calibri"/>
               </a:rPr>
-              <a:t>Pemantik kelas</a:t>
+              <a:t>Pemantik: Anda sudah hidup bersama teknologi</a:t>
             </a:r>
           </a:p>
         </p:txBody>
@@ -12646,7 +12442,7 @@
                 </a:solidFill>
                 <a:latin typeface="Calibri"/>
               </a:rPr>
-              <a:t>Teknologi sudah ada di HP Anda setiap hari</a:t>
+              <a:t>Mari kelompokkan bersama</a:t>
             </a:r>
           </a:p>
         </p:txBody>
@@ -12702,8 +12498,8 @@
         </p:nvSpPr>
         <p:spPr>
           <a:xfrm>
-            <a:off x="868680" y="1645920"/>
-            <a:ext cx="10424160" cy="548640"/>
+            <a:off x="868680" y="1600200"/>
+            <a:ext cx="10424160" cy="640080"/>
           </a:xfrm>
           <a:prstGeom prst="rect">
             <a:avLst/>
@@ -12718,13 +12514,13 @@
           <a:p>
             <a:pPr algn="l"/>
             <a:r>
-              <a:rPr sz="2000" b="1">
+              <a:rPr sz="1800" b="1">
                 <a:solidFill>
                   <a:srgbClr val="FFFFFF"/>
                 </a:solidFill>
                 <a:latin typeface="Calibri"/>
               </a:rPr>
-              <a:t>Sebutkan aplikasi di HP Anda yang paling sering dipakai. Kelompokkan bersama.</a:t>
+              <a:t>Sebutkan aplikasi yang paling sering Anda buka minggu ini. Lalu masukkan ke kotak yang cocok.</a:t>
             </a:r>
           </a:p>
         </p:txBody>
@@ -12781,7 +12577,7 @@
         <p:spPr>
           <a:xfrm>
             <a:off x="685800" y="3108960"/>
-            <a:ext cx="1874519" cy="731520"/>
+            <a:ext cx="1874519" cy="640080"/>
           </a:xfrm>
           <a:prstGeom prst="rect">
             <a:avLst/>
@@ -12802,7 +12598,7 @@
                 </a:solidFill>
                 <a:latin typeface="Calibri"/>
               </a:rPr>
-              <a:t>Transportasi</a:t>
+              <a:t>Bepergian</a:t>
             </a:r>
           </a:p>
         </p:txBody>
@@ -12815,7 +12611,7 @@
         </p:nvSpPr>
         <p:spPr>
           <a:xfrm>
-            <a:off x="685800" y="4023360"/>
+            <a:off x="685800" y="3931920"/>
             <a:ext cx="1874519" cy="1097280"/>
           </a:xfrm>
           <a:prstGeom prst="rect">
@@ -12894,7 +12690,7 @@
         <p:spPr>
           <a:xfrm>
             <a:off x="2971800" y="3108960"/>
-            <a:ext cx="1874519" cy="731520"/>
+            <a:ext cx="1874519" cy="640080"/>
           </a:xfrm>
           <a:prstGeom prst="rect">
             <a:avLst/>
@@ -12928,7 +12724,7 @@
         </p:nvSpPr>
         <p:spPr>
           <a:xfrm>
-            <a:off x="2971800" y="4023360"/>
+            <a:off x="2971800" y="3931920"/>
             <a:ext cx="1874519" cy="1097280"/>
           </a:xfrm>
           <a:prstGeom prst="rect">
@@ -13007,7 +12803,7 @@
         <p:spPr>
           <a:xfrm>
             <a:off x="5257800" y="3108960"/>
-            <a:ext cx="1874519" cy="731520"/>
+            <a:ext cx="1874519" cy="640080"/>
           </a:xfrm>
           <a:prstGeom prst="rect">
             <a:avLst/>
@@ -13028,7 +12824,7 @@
                 </a:solidFill>
                 <a:latin typeface="Calibri"/>
               </a:rPr>
-              <a:t>Pembayaran</a:t>
+              <a:t>Bayar</a:t>
             </a:r>
           </a:p>
         </p:txBody>
@@ -13041,7 +12837,7 @@
         </p:nvSpPr>
         <p:spPr>
           <a:xfrm>
-            <a:off x="5257800" y="4023360"/>
+            <a:off x="5257800" y="3931920"/>
             <a:ext cx="1874519" cy="1097280"/>
           </a:xfrm>
           <a:prstGeom prst="rect">
@@ -13120,7 +12916,7 @@
         <p:spPr>
           <a:xfrm>
             <a:off x="7543800" y="3108960"/>
-            <a:ext cx="1874519" cy="731520"/>
+            <a:ext cx="1874519" cy="640080"/>
           </a:xfrm>
           <a:prstGeom prst="rect">
             <a:avLst/>
@@ -13141,7 +12937,7 @@
                 </a:solidFill>
                 <a:latin typeface="Calibri"/>
               </a:rPr>
-              <a:t>Konten</a:t>
+              <a:t>Hiburan</a:t>
             </a:r>
           </a:p>
         </p:txBody>
@@ -13154,7 +12950,7 @@
         </p:nvSpPr>
         <p:spPr>
           <a:xfrm>
-            <a:off x="7543800" y="4023360"/>
+            <a:off x="7543800" y="3931920"/>
             <a:ext cx="1874519" cy="1097280"/>
           </a:xfrm>
           <a:prstGeom prst="rect">
@@ -13176,7 +12972,7 @@
                 </a:solidFill>
                 <a:latin typeface="Calibri"/>
               </a:rPr>
-              <a:t>Video, sosial media</a:t>
+              <a:t>Video, media sosial</a:t>
             </a:r>
           </a:p>
         </p:txBody>
@@ -13233,7 +13029,7 @@
         <p:spPr>
           <a:xfrm>
             <a:off x="9829800" y="3108960"/>
-            <a:ext cx="1874519" cy="731520"/>
+            <a:ext cx="1874519" cy="640080"/>
           </a:xfrm>
           <a:prstGeom prst="rect">
             <a:avLst/>
@@ -13254,7 +13050,7 @@
                 </a:solidFill>
                 <a:latin typeface="Calibri"/>
               </a:rPr>
-              <a:t>Produktivitas</a:t>
+              <a:t>Belajar/kerja</a:t>
             </a:r>
           </a:p>
         </p:txBody>
@@ -13267,7 +13063,7 @@
         </p:nvSpPr>
         <p:spPr>
           <a:xfrm>
-            <a:off x="9829800" y="4023360"/>
+            <a:off x="9829800" y="3931920"/>
             <a:ext cx="1874519" cy="1097280"/>
           </a:xfrm>
           <a:prstGeom prst="rect">
@@ -13289,7 +13085,7 @@
                 </a:solidFill>
                 <a:latin typeface="Calibri"/>
               </a:rPr>
-              <a:t>Catatan, drive, chat kerja</a:t>
+              <a:t>Catatan, chat, drive</a:t>
             </a:r>
           </a:p>
         </p:txBody>
@@ -13324,7 +13120,7 @@
                 </a:solidFill>
                 <a:latin typeface="Calibri"/>
               </a:rPr>
-              <a:t>Technopreneurship · S1 Bisnis Digital Sem 3 · Sub-CPMK 1.2</a:t>
+              <a:t>Technopreneurship · Bisnis Digital Sem 3 · Sub-CPMK 1.2</a:t>
             </a:r>
           </a:p>
         </p:txBody>
@@ -13492,13 +13288,13 @@
           <a:p>
             <a:pPr algn="l"/>
             <a:r>
-              <a:rPr sz="2800" b="1">
+              <a:rPr sz="2600" b="1">
                 <a:solidFill>
                   <a:srgbClr val="0F2C4C"/>
                 </a:solidFill>
                 <a:latin typeface="Calibri"/>
               </a:rPr>
-              <a:t>Prinsip kelas</a:t>
+              <a:t>Prinsip yang menenangkan</a:t>
             </a:r>
           </a:p>
         </p:txBody>
@@ -13533,7 +13329,7 @@
                 </a:solidFill>
                 <a:latin typeface="Calibri"/>
               </a:rPr>
-              <a:t>Kita bukan belajar jadi engineer</a:t>
+              <a:t>Teknologi adalah alat bantu manusia</a:t>
             </a:r>
           </a:p>
         </p:txBody>
@@ -13589,8 +13385,8 @@
         </p:nvSpPr>
         <p:spPr>
           <a:xfrm>
-            <a:off x="1554480" y="2103120"/>
-            <a:ext cx="9052560" cy="914400"/>
+            <a:off x="1645920" y="2103120"/>
+            <a:ext cx="8869680" cy="1005840"/>
           </a:xfrm>
           <a:prstGeom prst="rect">
             <a:avLst/>
@@ -13605,14 +13401,14 @@
           <a:p>
             <a:pPr algn="ctr"/>
             <a:r>
-              <a:rPr sz="2600" b="1">
+              <a:rPr sz="2400" b="1">
                 <a:solidFill>
                   <a:srgbClr val="0F2C4C"/>
                 </a:solidFill>
                 <a:latin typeface="Calibri"/>
               </a:rPr>
-              <a:t>Kita belajar memilih teknologi
-yang menyelesaikan masalah pelanggan.</a:t>
+              <a:t>Kita tidak wajib memakai teknologi canggih.
+Kita wajib menolong orang dengan cara yang masuk akal.</a:t>
             </a:r>
           </a:p>
         </p:txBody>
@@ -13625,8 +13421,8 @@
         </p:nvSpPr>
         <p:spPr>
           <a:xfrm>
-            <a:off x="2011680" y="3474720"/>
-            <a:ext cx="8138160" cy="1645920"/>
+            <a:off x="2194560" y="3657600"/>
+            <a:ext cx="7955279" cy="1463040"/>
           </a:xfrm>
           <a:prstGeom prst="rect">
             <a:avLst/>
@@ -13645,13 +13441,13 @@
               </a:spcAft>
             </a:pPr>
             <a:r>
-              <a:rPr sz="1800" b="0">
+              <a:rPr sz="1700" b="0">
                 <a:solidFill>
                   <a:srgbClr val="1C1C1C"/>
                 </a:solidFill>
                 <a:latin typeface="Calibri"/>
               </a:rPr>
-              <a:t>• Teknologi = alat (enabler)</a:t>
+              <a:t>• Utamakan pemahaman pada orang yang dibantu</a:t>
             </a:r>
           </a:p>
           <a:p>
@@ -13661,13 +13457,13 @@
               </a:spcAft>
             </a:pPr>
             <a:r>
-              <a:rPr sz="1800" b="0">
+              <a:rPr sz="1700" b="0">
                 <a:solidFill>
                   <a:srgbClr val="1C1C1C"/>
                 </a:solidFill>
                 <a:latin typeface="Calibri"/>
               </a:rPr>
-              <a:t>• Keunggulan utama = pemahaman pengguna + model bisnis</a:t>
+              <a:t>• Baru pilih alat yang paling sederhana namun cukup</a:t>
             </a:r>
           </a:p>
           <a:p>
@@ -13677,13 +13473,13 @@
               </a:spcAft>
             </a:pPr>
             <a:r>
-              <a:rPr sz="1800" b="0">
+              <a:rPr sz="1700" b="0">
                 <a:solidFill>
                   <a:srgbClr val="1C1C1C"/>
                 </a:solidFill>
                 <a:latin typeface="Calibri"/>
               </a:rPr>
-              <a:t>• Jangan pilih AI/IoT hanya karena “lagi tren”</a:t>
+              <a:t>• Jangan pilih AI hanya karena terdengar modern</a:t>
             </a:r>
           </a:p>
         </p:txBody>
@@ -13718,7 +13514,7 @@
                 </a:solidFill>
                 <a:latin typeface="Calibri"/>
               </a:rPr>
-              <a:t>Technopreneurship · S1 Bisnis Digital Sem 3 · Sub-CPMK 1.2</a:t>
+              <a:t>Technopreneurship · Bisnis Digital Sem 3 · Sub-CPMK 1.2</a:t>
             </a:r>
           </a:p>
         </p:txBody>
@@ -13886,13 +13682,13 @@
           <a:p>
             <a:pPr algn="l"/>
             <a:r>
-              <a:rPr sz="2800" b="1">
+              <a:rPr sz="2600" b="1">
                 <a:solidFill>
                   <a:srgbClr val="0F2C4C"/>
                 </a:solidFill>
                 <a:latin typeface="Calibri"/>
               </a:rPr>
-              <a:t>1. Platform</a:t>
+              <a:t>1. Platform: tempat orang bertemu orang</a:t>
             </a:r>
           </a:p>
         </p:txBody>
@@ -13927,7 +13723,7 @@
                 </a:solidFill>
                 <a:latin typeface="Calibri"/>
               </a:rPr>
-              <a:t>Tempat bertemunya dua sisi atau lebih</a:t>
+              <a:t>Seperti pasar, tapi bisa digenggam di HP</a:t>
             </a:r>
           </a:p>
         </p:txBody>
@@ -13999,13 +13795,13 @@
           <a:p>
             <a:pPr algn="l"/>
             <a:r>
-              <a:rPr sz="1800" b="0">
+              <a:rPr sz="1700" b="0">
                 <a:solidFill>
                   <a:srgbClr val="1C1C1C"/>
                 </a:solidFill>
                 <a:latin typeface="Calibri"/>
               </a:rPr>
-              <a:t>Platform menghubungkan pihak yang saling membutuhkan: penjual–pembeli, driver–penumpang, pemilik kos–pencari kos, dan seterusnya.</a:t>
+              <a:t>Platform mempertemukan dua pihak yang saling membutuhkan: penjual dengan pembeli, driver dengan penumpang, pemilik kos dengan pencari kos.</a:t>
             </a:r>
           </a:p>
         </p:txBody>
@@ -14055,44 +13851,36 @@
       </p:sp>
       <p:sp>
         <p:nvSpPr>
-          <p:cNvPr id="9" name="Rectangle 8"/>
-          <p:cNvSpPr/>
-          <p:nvPr/>
-        </p:nvSpPr>
-        <p:spPr>
-          <a:xfrm>
-            <a:off x="548640" y="3017520"/>
-            <a:ext cx="3611880" cy="109728"/>
-          </a:xfrm>
-          <a:prstGeom prst="rect">
-            <a:avLst/>
-          </a:prstGeom>
-          <a:solidFill>
-            <a:srgbClr val="1A6B6B"/>
-          </a:solidFill>
-          <a:ln>
-            <a:noFill/>
-          </a:ln>
-        </p:spPr>
-        <p:style>
-          <a:lnRef idx="1">
-            <a:schemeClr val="accent1"/>
-          </a:lnRef>
-          <a:fillRef idx="3">
-            <a:schemeClr val="accent1"/>
-          </a:fillRef>
-          <a:effectRef idx="2">
-            <a:schemeClr val="accent1"/>
-          </a:effectRef>
-          <a:fontRef idx="minor">
-            <a:schemeClr val="lt1"/>
-          </a:fontRef>
-        </p:style>
-        <p:txBody>
-          <a:bodyPr rtlCol="0" anchor="ctr"/>
-          <a:lstStyle/>
-          <a:p>
-            <a:pPr algn="ctr"/>
+          <p:cNvPr id="9" name="TextBox 8"/>
+          <p:cNvSpPr txBox="1"/>
+          <p:nvPr/>
+        </p:nvSpPr>
+        <p:spPr>
+          <a:xfrm>
+            <a:off x="777240" y="3291840"/>
+            <a:ext cx="3154680" cy="457200"/>
+          </a:xfrm>
+          <a:prstGeom prst="rect">
+            <a:avLst/>
+          </a:prstGeom>
+          <a:noFill/>
+        </p:spPr>
+        <p:txBody>
+          <a:bodyPr wrap="square">
+            <a:spAutoFit/>
+          </a:bodyPr>
+          <a:lstStyle/>
+          <a:p>
+            <a:pPr algn="l"/>
+            <a:r>
+              <a:rPr sz="1700" b="1">
+                <a:solidFill>
+                  <a:srgbClr val="0F2C4C"/>
+                </a:solidFill>
+                <a:latin typeface="Calibri"/>
+              </a:rPr>
+              <a:t>Nilainya apa?</a:t>
+            </a:r>
           </a:p>
         </p:txBody>
       </p:sp>
@@ -14104,8 +13892,8 @@
         </p:nvSpPr>
         <p:spPr>
           <a:xfrm>
-            <a:off x="777240" y="3291840"/>
-            <a:ext cx="3154680" cy="411480"/>
+            <a:off x="777240" y="3931920"/>
+            <a:ext cx="3154680" cy="1280160"/>
           </a:xfrm>
           <a:prstGeom prst="rect">
             <a:avLst/>
@@ -14120,55 +13908,20 @@
           <a:p>
             <a:pPr algn="l"/>
             <a:r>
-              <a:rPr sz="1800" b="1">
-                <a:solidFill>
-                  <a:srgbClr val="0F2C4C"/>
-                </a:solidFill>
-                <a:latin typeface="Calibri"/>
-              </a:rPr>
-              <a:t>Nilai utama</a:t>
-            </a:r>
-          </a:p>
-        </p:txBody>
-      </p:sp>
-      <p:sp>
-        <p:nvSpPr>
-          <p:cNvPr id="11" name="TextBox 10"/>
-          <p:cNvSpPr txBox="1"/>
-          <p:nvPr/>
-        </p:nvSpPr>
-        <p:spPr>
-          <a:xfrm>
-            <a:off x="777240" y="3886200"/>
-            <a:ext cx="3154680" cy="1371600"/>
-          </a:xfrm>
-          <a:prstGeom prst="rect">
-            <a:avLst/>
-          </a:prstGeom>
-          <a:noFill/>
-        </p:spPr>
-        <p:txBody>
-          <a:bodyPr wrap="square">
-            <a:spAutoFit/>
-          </a:bodyPr>
-          <a:lstStyle/>
-          <a:p>
-            <a:pPr algn="l"/>
-            <a:r>
               <a:rPr sz="1500" b="0">
                 <a:solidFill>
                   <a:srgbClr val="5A6570"/>
                 </a:solidFill>
                 <a:latin typeface="Calibri"/>
               </a:rPr>
-              <a:t>Jaringan pengguna: semakin banyak pihak, semakin menarik platformnya.</a:t>
-            </a:r>
-          </a:p>
-        </p:txBody>
-      </p:sp>
-      <p:sp>
-        <p:nvSpPr>
-          <p:cNvPr id="12" name="Rounded Rectangle 11"/>
+              <a:t>Semakin banyak orang datang, semakin ramai dan berguna.</a:t>
+            </a:r>
+          </a:p>
+        </p:txBody>
+      </p:sp>
+      <p:sp>
+        <p:nvSpPr>
+          <p:cNvPr id="11" name="Rounded Rectangle 10"/>
           <p:cNvSpPr/>
           <p:nvPr/>
         </p:nvSpPr>
@@ -14211,57 +13964,14 @@
       </p:sp>
       <p:sp>
         <p:nvSpPr>
-          <p:cNvPr id="13" name="Rectangle 12"/>
-          <p:cNvSpPr/>
-          <p:nvPr/>
-        </p:nvSpPr>
-        <p:spPr>
-          <a:xfrm>
-            <a:off x="4343400" y="3017520"/>
-            <a:ext cx="3611880" cy="109728"/>
-          </a:xfrm>
-          <a:prstGeom prst="rect">
-            <a:avLst/>
-          </a:prstGeom>
-          <a:solidFill>
-            <a:srgbClr val="1A6B6B"/>
-          </a:solidFill>
-          <a:ln>
-            <a:noFill/>
-          </a:ln>
-        </p:spPr>
-        <p:style>
-          <a:lnRef idx="1">
-            <a:schemeClr val="accent1"/>
-          </a:lnRef>
-          <a:fillRef idx="3">
-            <a:schemeClr val="accent1"/>
-          </a:fillRef>
-          <a:effectRef idx="2">
-            <a:schemeClr val="accent1"/>
-          </a:effectRef>
-          <a:fontRef idx="minor">
-            <a:schemeClr val="lt1"/>
-          </a:fontRef>
-        </p:style>
-        <p:txBody>
-          <a:bodyPr rtlCol="0" anchor="ctr"/>
-          <a:lstStyle/>
-          <a:p>
-            <a:pPr algn="ctr"/>
-          </a:p>
-        </p:txBody>
-      </p:sp>
-      <p:sp>
-        <p:nvSpPr>
-          <p:cNvPr id="14" name="TextBox 13"/>
+          <p:cNvPr id="12" name="TextBox 11"/>
           <p:cNvSpPr txBox="1"/>
           <p:nvPr/>
         </p:nvSpPr>
         <p:spPr>
           <a:xfrm>
             <a:off x="4572000" y="3291840"/>
-            <a:ext cx="3154680" cy="411480"/>
+            <a:ext cx="3154680" cy="457200"/>
           </a:xfrm>
           <a:prstGeom prst="rect">
             <a:avLst/>
@@ -14276,27 +13986,27 @@
           <a:p>
             <a:pPr algn="l"/>
             <a:r>
-              <a:rPr sz="1800" b="1">
+              <a:rPr sz="1700" b="1">
                 <a:solidFill>
                   <a:srgbClr val="0F2C4C"/>
                 </a:solidFill>
                 <a:latin typeface="Calibri"/>
               </a:rPr>
-              <a:t>Contoh</a:t>
-            </a:r>
-          </a:p>
-        </p:txBody>
-      </p:sp>
-      <p:sp>
-        <p:nvSpPr>
-          <p:cNvPr id="15" name="TextBox 14"/>
-          <p:cNvSpPr txBox="1"/>
-          <p:nvPr/>
-        </p:nvSpPr>
-        <p:spPr>
-          <a:xfrm>
-            <a:off x="4572000" y="3886200"/>
-            <a:ext cx="3154680" cy="1371600"/>
+              <a:t>Contoh yang familiar</a:t>
+            </a:r>
+          </a:p>
+        </p:txBody>
+      </p:sp>
+      <p:sp>
+        <p:nvSpPr>
+          <p:cNvPr id="13" name="TextBox 12"/>
+          <p:cNvSpPr txBox="1"/>
+          <p:nvPr/>
+        </p:nvSpPr>
+        <p:spPr>
+          <a:xfrm>
+            <a:off x="4572000" y="3931920"/>
+            <a:ext cx="3154680" cy="1280160"/>
           </a:xfrm>
           <a:prstGeom prst="rect">
             <a:avLst/>
@@ -14317,14 +14027,14 @@
                 </a:solidFill>
                 <a:latin typeface="Calibri"/>
               </a:rPr>
-              <a:t>Gojek, Tokopedia, marketplace jasa, platform booking.</a:t>
-            </a:r>
-          </a:p>
-        </p:txBody>
-      </p:sp>
-      <p:sp>
-        <p:nvSpPr>
-          <p:cNvPr id="16" name="Rounded Rectangle 15"/>
+              <a:t>Gojek, Tokopedia, booking tempat.</a:t>
+            </a:r>
+          </a:p>
+        </p:txBody>
+      </p:sp>
+      <p:sp>
+        <p:nvSpPr>
+          <p:cNvPr id="14" name="Rounded Rectangle 13"/>
           <p:cNvSpPr/>
           <p:nvPr/>
         </p:nvSpPr>
@@ -14367,57 +14077,14 @@
       </p:sp>
       <p:sp>
         <p:nvSpPr>
-          <p:cNvPr id="17" name="Rectangle 16"/>
-          <p:cNvSpPr/>
-          <p:nvPr/>
-        </p:nvSpPr>
-        <p:spPr>
-          <a:xfrm>
-            <a:off x="8138160" y="3017520"/>
-            <a:ext cx="3611880" cy="109728"/>
-          </a:xfrm>
-          <a:prstGeom prst="rect">
-            <a:avLst/>
-          </a:prstGeom>
-          <a:solidFill>
-            <a:srgbClr val="1A6B6B"/>
-          </a:solidFill>
-          <a:ln>
-            <a:noFill/>
-          </a:ln>
-        </p:spPr>
-        <p:style>
-          <a:lnRef idx="1">
-            <a:schemeClr val="accent1"/>
-          </a:lnRef>
-          <a:fillRef idx="3">
-            <a:schemeClr val="accent1"/>
-          </a:fillRef>
-          <a:effectRef idx="2">
-            <a:schemeClr val="accent1"/>
-          </a:effectRef>
-          <a:fontRef idx="minor">
-            <a:schemeClr val="lt1"/>
-          </a:fontRef>
-        </p:style>
-        <p:txBody>
-          <a:bodyPr rtlCol="0" anchor="ctr"/>
-          <a:lstStyle/>
-          <a:p>
-            <a:pPr algn="ctr"/>
-          </a:p>
-        </p:txBody>
-      </p:sp>
-      <p:sp>
-        <p:nvSpPr>
-          <p:cNvPr id="18" name="TextBox 17"/>
+          <p:cNvPr id="15" name="TextBox 14"/>
           <p:cNvSpPr txBox="1"/>
           <p:nvPr/>
         </p:nvSpPr>
         <p:spPr>
           <a:xfrm>
             <a:off x="8366760" y="3291840"/>
-            <a:ext cx="3154680" cy="411480"/>
+            <a:ext cx="3154680" cy="457200"/>
           </a:xfrm>
           <a:prstGeom prst="rect">
             <a:avLst/>
@@ -14432,27 +14099,27 @@
           <a:p>
             <a:pPr algn="l"/>
             <a:r>
-              <a:rPr sz="1800" b="1">
+              <a:rPr sz="1700" b="1">
                 <a:solidFill>
                   <a:srgbClr val="0F2C4C"/>
                 </a:solidFill>
                 <a:latin typeface="Calibri"/>
               </a:rPr>
-              <a:t>Untuk mahasiswa</a:t>
-            </a:r>
-          </a:p>
-        </p:txBody>
-      </p:sp>
-      <p:sp>
-        <p:nvSpPr>
-          <p:cNvPr id="19" name="TextBox 18"/>
-          <p:cNvSpPr txBox="1"/>
-          <p:nvPr/>
-        </p:nvSpPr>
-        <p:spPr>
-          <a:xfrm>
-            <a:off x="8366760" y="3886200"/>
-            <a:ext cx="3154680" cy="1371600"/>
+              <a:t>Tanya untuk ide Anda</a:t>
+            </a:r>
+          </a:p>
+        </p:txBody>
+      </p:sp>
+      <p:sp>
+        <p:nvSpPr>
+          <p:cNvPr id="16" name="TextBox 15"/>
+          <p:cNvSpPr txBox="1"/>
+          <p:nvPr/>
+        </p:nvSpPr>
+        <p:spPr>
+          <a:xfrm>
+            <a:off x="8366760" y="3931920"/>
+            <a:ext cx="3154680" cy="1280160"/>
           </a:xfrm>
           <a:prstGeom prst="rect">
             <a:avLst/>
@@ -14473,14 +14140,14 @@
                 </a:solidFill>
                 <a:latin typeface="Calibri"/>
               </a:rPr>
-              <a:t>Tanya: apakah ide saya perlu mempertemukan dua sisi pasar?</a:t>
-            </a:r>
-          </a:p>
-        </p:txBody>
-      </p:sp>
-      <p:sp>
-        <p:nvSpPr>
-          <p:cNvPr id="20" name="TextBox 19"/>
+              <a:t>Apakah ide saya perlu mempertemukan dua sisi?</a:t>
+            </a:r>
+          </a:p>
+        </p:txBody>
+      </p:sp>
+      <p:sp>
+        <p:nvSpPr>
+          <p:cNvPr id="17" name="TextBox 16"/>
           <p:cNvSpPr txBox="1"/>
           <p:nvPr/>
         </p:nvSpPr>
@@ -14508,14 +14175,14 @@
                 </a:solidFill>
                 <a:latin typeface="Calibri"/>
               </a:rPr>
-              <a:t>Technopreneurship · S1 Bisnis Digital Sem 3 · Sub-CPMK 1.2</a:t>
-            </a:r>
-          </a:p>
-        </p:txBody>
-      </p:sp>
-      <p:sp>
-        <p:nvSpPr>
-          <p:cNvPr id="21" name="TextBox 20"/>
+              <a:t>Technopreneurship · Bisnis Digital Sem 3 · Sub-CPMK 1.2</a:t>
+            </a:r>
+          </a:p>
+        </p:txBody>
+      </p:sp>
+      <p:sp>
+        <p:nvSpPr>
+          <p:cNvPr id="18" name="TextBox 17"/>
           <p:cNvSpPr txBox="1"/>
           <p:nvPr/>
         </p:nvSpPr>
@@ -14676,13 +14343,13 @@
           <a:p>
             <a:pPr algn="l"/>
             <a:r>
-              <a:rPr sz="2800" b="1">
+              <a:rPr sz="2600" b="1">
                 <a:solidFill>
                   <a:srgbClr val="0F2C4C"/>
                 </a:solidFill>
                 <a:latin typeface="Calibri"/>
               </a:rPr>
-              <a:t>Efek jaringan (sederhana)</a:t>
+              <a:t>Kenapa platform besar terasa “susah diganti”?</a:t>
             </a:r>
           </a:p>
         </p:txBody>
@@ -14717,7 +14384,7 @@
                 </a:solidFill>
                 <a:latin typeface="Calibri"/>
               </a:rPr>
-              <a:t>Kenapa platform besar sulit digeser</a:t>
+              <a:t>Karena orang ikut orang—secara sederhana</a:t>
             </a:r>
           </a:p>
         </p:txBody>
@@ -14873,7 +14540,7 @@
                 </a:solidFill>
                 <a:latin typeface="Calibri"/>
               </a:rPr>
-              <a:t>Sedikit pengguna</a:t>
+              <a:t>Masih sepi</a:t>
             </a:r>
           </a:p>
         </p:txBody>
@@ -14908,7 +14575,7 @@
                 </a:solidFill>
                 <a:latin typeface="Calibri"/>
               </a:rPr>
-              <a:t>Platform masih sepi; nilai belum terasa.</a:t>
+              <a:t>Sedikit orang → sedikit manfaat.</a:t>
             </a:r>
           </a:p>
         </p:txBody>
@@ -15021,7 +14688,7 @@
                 </a:solidFill>
                 <a:latin typeface="Calibri"/>
               </a:rPr>
-              <a:t>Pengguna bertambah</a:t>
+              <a:t>Mulai ramai</a:t>
             </a:r>
           </a:p>
         </p:txBody>
@@ -15056,7 +14723,7 @@
                 </a:solidFill>
                 <a:latin typeface="Calibri"/>
               </a:rPr>
-              <a:t>Penjual/driver/pembeli saling menarik.</a:t>
+              <a:t>Penjual datang karena ada pembeli; pembeli datang karena ada pilihan.</a:t>
             </a:r>
           </a:p>
         </p:txBody>
@@ -15169,7 +14836,7 @@
                 </a:solidFill>
                 <a:latin typeface="Calibri"/>
               </a:rPr>
-              <a:t>Nilai naik</a:t>
+              <a:t>Semakin berguna</a:t>
             </a:r>
           </a:p>
         </p:txBody>
@@ -15204,7 +14871,7 @@
                 </a:solidFill>
                 <a:latin typeface="Calibri"/>
               </a:rPr>
-              <a:t>Lebih banyak pilihan, lebih cepat transaksi.</a:t>
+              <a:t>Transaksi lebih cepat, pilihan lebih banyak.</a:t>
             </a:r>
           </a:p>
         </p:txBody>
@@ -15317,7 +14984,7 @@
                 </a:solidFill>
                 <a:latin typeface="Calibri"/>
               </a:rPr>
-              <a:t>Semakin menarik</a:t>
+              <a:t>Semakin dipercaya</a:t>
             </a:r>
           </a:p>
         </p:txBody>
@@ -15352,7 +15019,7 @@
                 </a:solidFill>
                 <a:latin typeface="Calibri"/>
               </a:rPr>
-              <a:t>Pengguna baru datang karena jaringan sudah besar.</a:t>
+              <a:t>Orang baru ikut karena banyak yang sudah pakai.</a:t>
             </a:r>
           </a:p>
         </p:txBody>
@@ -15387,7 +15054,7 @@
                 </a:solidFill>
                 <a:latin typeface="Calibri"/>
               </a:rPr>
-              <a:t>Technopreneurship · S1 Bisnis Digital Sem 3 · Sub-CPMK 1.2</a:t>
+              <a:t>Technopreneurship · Bisnis Digital Sem 3 · Sub-CPMK 1.2</a:t>
             </a:r>
           </a:p>
         </p:txBody>
@@ -15555,13 +15222,13 @@
           <a:p>
             <a:pPr algn="l"/>
             <a:r>
-              <a:rPr sz="2800" b="1">
+              <a:rPr sz="2600" b="1">
                 <a:solidFill>
                   <a:srgbClr val="0F2C4C"/>
                 </a:solidFill>
                 <a:latin typeface="Calibri"/>
               </a:rPr>
-              <a:t>2. Fintech</a:t>
+              <a:t>2. Pembayaran digital (fintech)</a:t>
             </a:r>
           </a:p>
         </p:txBody>
@@ -15596,7 +15263,7 @@
                 </a:solidFill>
                 <a:latin typeface="Calibri"/>
               </a:rPr>
-              <a:t>Teknologi untuk jasa keuangan</a:t>
+              <a:t>Biar orang lebih mudah bayar—dan Anda lebih mudah catat</a:t>
             </a:r>
           </a:p>
         </p:txBody>
@@ -15674,7 +15341,7 @@
                 </a:solidFill>
                 <a:latin typeface="Calibri"/>
               </a:rPr>
-              <a:t>Fintech membantu pembayaran, pinjaman, e-wallet, QRIS, transfer, dan pencatatan keuangan menjadi lebih cepat serta mudah diakses.</a:t>
+              <a:t>Fintech = teknologi yang membantu urusan uang: bayar, transfer, e-wallet, QRIS, dan pencatatan.</a:t>
             </a:r>
           </a:p>
         </p:txBody>
@@ -15752,7 +15419,7 @@
                 </a:solidFill>
                 <a:latin typeface="Calibri"/>
               </a:rPr>
-              <a:t>Pembayaran</a:t>
+              <a:t>Bayar cepat</a:t>
             </a:r>
           </a:p>
         </p:txBody>
@@ -15766,7 +15433,7 @@
         <p:spPr>
           <a:xfrm>
             <a:off x="731520" y="4023360"/>
-            <a:ext cx="2377440" cy="1188720"/>
+            <a:ext cx="2377440" cy="1097280"/>
           </a:xfrm>
           <a:prstGeom prst="rect">
             <a:avLst/>
@@ -15787,7 +15454,7 @@
                 </a:solidFill>
                 <a:latin typeface="Calibri"/>
               </a:rPr>
-              <a:t>QRIS, e-wallet, payment gateway</a:t>
+              <a:t>QRIS, e-wallet, transfer</a:t>
             </a:r>
           </a:p>
         </p:txBody>
@@ -15865,7 +15532,7 @@
                 </a:solidFill>
                 <a:latin typeface="Calibri"/>
               </a:rPr>
-              <a:t>Pinjaman/kredit</a:t>
+              <a:t>Kurangi antre</a:t>
             </a:r>
           </a:p>
         </p:txBody>
@@ -15879,7 +15546,7 @@
         <p:spPr>
           <a:xfrm>
             <a:off x="3611880" y="4023360"/>
-            <a:ext cx="2377440" cy="1188720"/>
+            <a:ext cx="2377440" cy="1097280"/>
           </a:xfrm>
           <a:prstGeom prst="rect">
             <a:avLst/>
@@ -15900,7 +15567,7 @@
                 </a:solidFill>
                 <a:latin typeface="Calibri"/>
               </a:rPr>
-              <a:t>Skoring &amp; penyaluran digital (kenalkan konsep)</a:t>
+              <a:t>Tidak selalu harus tunai</a:t>
             </a:r>
           </a:p>
         </p:txBody>
@@ -15978,7 +15645,7 @@
                 </a:solidFill>
                 <a:latin typeface="Calibri"/>
               </a:rPr>
-              <a:t>Pencatatan</a:t>
+              <a:t>Catatan lebih rapi</a:t>
             </a:r>
           </a:p>
         </p:txBody>
@@ -15992,7 +15659,7 @@
         <p:spPr>
           <a:xfrm>
             <a:off x="6492240" y="4023360"/>
-            <a:ext cx="2377440" cy="1188720"/>
+            <a:ext cx="2377440" cy="1097280"/>
           </a:xfrm>
           <a:prstGeom prst="rect">
             <a:avLst/>
@@ -16013,7 +15680,7 @@
                 </a:solidFill>
                 <a:latin typeface="Calibri"/>
               </a:rPr>
-              <a:t>Mutasi otomatis, rekonsiliasi sederhana</a:t>
+              <a:t>Riwayat transaksi terbantu</a:t>
             </a:r>
           </a:p>
         </p:txBody>
@@ -16091,7 +15758,7 @@
                 </a:solidFill>
                 <a:latin typeface="Calibri"/>
               </a:rPr>
-              <a:t>Manfaat bisnis</a:t>
+              <a:t>Kepercayaan naik</a:t>
             </a:r>
           </a:p>
         </p:txBody>
@@ -16105,7 +15772,7 @@
         <p:spPr>
           <a:xfrm>
             <a:off x="9372599" y="4023360"/>
-            <a:ext cx="2377440" cy="1188720"/>
+            <a:ext cx="2377440" cy="1097280"/>
           </a:xfrm>
           <a:prstGeom prst="rect">
             <a:avLst/>
@@ -16126,7 +15793,7 @@
                 </a:solidFill>
                 <a:latin typeface="Calibri"/>
               </a:rPr>
-              <a:t>Transaksi lancar → kepercayaan naik</a:t>
+              <a:t>Proses bayar terasa aman</a:t>
             </a:r>
           </a:p>
         </p:txBody>
@@ -16161,7 +15828,7 @@
                 </a:solidFill>
                 <a:latin typeface="Calibri"/>
               </a:rPr>
-              <a:t>Technopreneurship · S1 Bisnis Digital Sem 3 · Sub-CPMK 1.2</a:t>
+              <a:t>Technopreneurship · Bisnis Digital Sem 3 · Sub-CPMK 1.2</a:t>
             </a:r>
           </a:p>
         </p:txBody>
@@ -16329,13 +15996,13 @@
           <a:p>
             <a:pPr algn="l"/>
             <a:r>
-              <a:rPr sz="2800" b="1">
+              <a:rPr sz="2600" b="1">
                 <a:solidFill>
                   <a:srgbClr val="0F2C4C"/>
                 </a:solidFill>
                 <a:latin typeface="Calibri"/>
               </a:rPr>
-              <a:t>Fintech untuk bisnis digital</a:t>
+              <a:t>Bayangkan dua suasana toko</a:t>
             </a:r>
           </a:p>
         </p:txBody>
@@ -16370,7 +16037,7 @@
                 </a:solidFill>
                 <a:latin typeface="Calibri"/>
               </a:rPr>
-              <a:t>Bukan hanya “punya e-wallet”</a:t>
+              <a:t>Mana yang lebih menenangkan pelanggan?</a:t>
             </a:r>
           </a:p>
         </p:txBody>
@@ -16446,13 +16113,13 @@
               </a:spcAft>
             </a:pPr>
             <a:r>
-              <a:rPr sz="1800" b="0">
+              <a:rPr sz="1700" b="0">
                 <a:solidFill>
                   <a:srgbClr val="1C1C1C"/>
                 </a:solidFill>
                 <a:latin typeface="Calibri"/>
               </a:rPr>
-              <a:t>Tanpa fintech yang baik:</a:t>
+              <a:t>Kalau pembayaran ribet:</a:t>
             </a:r>
           </a:p>
           <a:p>
@@ -16462,13 +16129,13 @@
               </a:spcAft>
             </a:pPr>
             <a:r>
-              <a:rPr sz="1800" b="0">
+              <a:rPr sz="1700" b="0">
                 <a:solidFill>
                   <a:srgbClr val="1C1C1C"/>
                 </a:solidFill>
                 <a:latin typeface="Calibri"/>
               </a:rPr>
-              <a:t>• Pembayaran ribet</a:t>
+              <a:t>• Harus cari uang pas</a:t>
             </a:r>
           </a:p>
           <a:p>
@@ -16478,7 +16145,7 @@
               </a:spcAft>
             </a:pPr>
             <a:r>
-              <a:rPr sz="1800" b="0">
+              <a:rPr sz="1700" b="0">
                 <a:solidFill>
                   <a:srgbClr val="1C1C1C"/>
                 </a:solidFill>
@@ -16494,13 +16161,45 @@
               </a:spcAft>
             </a:pPr>
             <a:r>
-              <a:rPr sz="1800" b="0">
+              <a:rPr sz="1700" b="0">
                 <a:solidFill>
                   <a:srgbClr val="1C1C1C"/>
                 </a:solidFill>
                 <a:latin typeface="Calibri"/>
               </a:rPr>
-              <a:t>• Pelanggan ragu checkout</a:t>
+              <a:t>• Pelanggan ragu menyelesaikan beli</a:t>
+            </a:r>
+          </a:p>
+          <a:p>
+            <a:pPr algn="l">
+              <a:spcAft>
+                <a:spcPts val="600"/>
+              </a:spcAft>
+            </a:pPr>
+            <a:r>
+              <a:rPr sz="1700" b="0">
+                <a:solidFill>
+                  <a:srgbClr val="1C1C1C"/>
+                </a:solidFill>
+                <a:latin typeface="Calibri"/>
+              </a:rPr>
+              <a:t/>
+            </a:r>
+          </a:p>
+          <a:p>
+            <a:pPr algn="l">
+              <a:spcAft>
+                <a:spcPts val="600"/>
+              </a:spcAft>
+            </a:pPr>
+            <a:r>
+              <a:rPr sz="1700" b="0">
+                <a:solidFill>
+                  <a:srgbClr val="1C1C1C"/>
+                </a:solidFill>
+                <a:latin typeface="Calibri"/>
+              </a:rPr>
+              <a:t>Orang merasa dihambat.</a:t>
             </a:r>
           </a:p>
         </p:txBody>
@@ -16576,13 +16275,13 @@
               </a:spcAft>
             </a:pPr>
             <a:r>
-              <a:rPr sz="1800" b="0">
+              <a:rPr sz="1700" b="0">
                 <a:solidFill>
                   <a:srgbClr val="FFFFFF"/>
                 </a:solidFill>
                 <a:latin typeface="Calibri"/>
               </a:rPr>
-              <a:t>Dengan fintech yang tepat:</a:t>
+              <a:t>Kalau pembayaran mudah:</a:t>
             </a:r>
           </a:p>
           <a:p>
@@ -16592,13 +16291,13 @@
               </a:spcAft>
             </a:pPr>
             <a:r>
-              <a:rPr sz="1800" b="0">
+              <a:rPr sz="1700" b="0">
                 <a:solidFill>
                   <a:srgbClr val="FFFFFF"/>
                 </a:solidFill>
                 <a:latin typeface="Calibri"/>
               </a:rPr>
-              <a:t>• Bayar cepat (QRIS/gateway)</a:t>
+              <a:t>• Scan &amp; selesai</a:t>
             </a:r>
           </a:p>
           <a:p>
@@ -16608,13 +16307,13 @@
               </a:spcAft>
             </a:pPr>
             <a:r>
-              <a:rPr sz="1800" b="0">
+              <a:rPr sz="1700" b="0">
                 <a:solidFill>
                   <a:srgbClr val="FFFFFF"/>
                 </a:solidFill>
                 <a:latin typeface="Calibri"/>
               </a:rPr>
-              <a:t>• Data transaksi lebih rapi</a:t>
+              <a:t>• Riwayat lebih jelas</a:t>
             </a:r>
           </a:p>
           <a:p>
@@ -16624,13 +16323,45 @@
               </a:spcAft>
             </a:pPr>
             <a:r>
-              <a:rPr sz="1800" b="0">
+              <a:rPr sz="1700" b="0">
                 <a:solidFill>
                   <a:srgbClr val="FFFFFF"/>
                 </a:solidFill>
                 <a:latin typeface="Calibri"/>
               </a:rPr>
-              <a:t>• Proses usaha lebih terpercaya</a:t>
+              <a:t>• Pelanggan lebih tenang</a:t>
+            </a:r>
+          </a:p>
+          <a:p>
+            <a:pPr algn="l">
+              <a:spcAft>
+                <a:spcPts val="600"/>
+              </a:spcAft>
+            </a:pPr>
+            <a:r>
+              <a:rPr sz="1700" b="0">
+                <a:solidFill>
+                  <a:srgbClr val="FFFFFF"/>
+                </a:solidFill>
+                <a:latin typeface="Calibri"/>
+              </a:rPr>
+              <a:t/>
+            </a:r>
+          </a:p>
+          <a:p>
+            <a:pPr algn="l">
+              <a:spcAft>
+                <a:spcPts val="600"/>
+              </a:spcAft>
+            </a:pPr>
+            <a:r>
+              <a:rPr sz="1700" b="0">
+                <a:solidFill>
+                  <a:srgbClr val="FFFFFF"/>
+                </a:solidFill>
+                <a:latin typeface="Calibri"/>
+              </a:rPr>
+              <a:t>Orang merasa ditolong.</a:t>
             </a:r>
           </a:p>
         </p:txBody>
@@ -16665,7 +16396,7 @@
                 </a:solidFill>
                 <a:latin typeface="Calibri"/>
               </a:rPr>
-              <a:t>Technopreneurship · S1 Bisnis Digital Sem 3 · Sub-CPMK 1.2</a:t>
+              <a:t>Technopreneurship · Bisnis Digital Sem 3 · Sub-CPMK 1.2</a:t>
             </a:r>
           </a:p>
         </p:txBody>
